--- a/en/slides/17-Computer_Architecture-Verm1_Part_3-Code.pptx
+++ b/en/slides/17-Computer_Architecture-Verm1_Part_3-Code.pptx
@@ -143,18 +143,26 @@
   <p:extLst>
     <p:ext uri="{521415D9-36F7-43E2-AB2F-B90AF26B5E84}">
       <p14:sectionLst xmlns:p14="http://schemas.microsoft.com/office/powerpoint/2010/main">
-        <p14:section name="Opening" id="{2cc02f97-b4c1-fcc1-b1a5-4895ab09eeb5}">
+        <p14:section name="Opening" id="{f93728c4-6402-aedd-8225-cd29b73c0dd4}">
           <p14:sldIdLst>
             <p14:sldId id="256"/>
             <p14:sldId id="257"/>
           </p14:sldIdLst>
         </p14:section>
-        <p14:section name="The listings" id="{a698e8b6-9d88-40bf-4f42-2f6d2e8d5e39}">
+        <p14:section name="The listings" id="{9c3af936-509a-25cf-0f4e-999406e8c49f}">
           <p14:sldIdLst>
             <p14:sldId id="258"/>
+          </p14:sldIdLst>
+        </p14:section>
+        <p14:section name="Step 1: the memory of the game" id="{579a7a97-c214-61fd-c5ba-e31a00b7f496}">
+          <p14:sldIdLst>
             <p14:sldId id="259"/>
             <p14:sldId id="260"/>
             <p14:sldId id="261"/>
+          </p14:sldIdLst>
+        </p14:section>
+        <p14:section name="Step 2: three states" id="{5570f669-3e16-f769-b7fb-01cd3d276d3c}">
+          <p14:sldIdLst>
             <p14:sldId id="262"/>
             <p14:sldId id="263"/>
             <p14:sldId id="264"/>
@@ -162,12 +170,20 @@
             <p14:sldId id="266"/>
             <p14:sldId id="267"/>
             <p14:sldId id="268"/>
+          </p14:sldIdLst>
+        </p14:section>
+        <p14:section name="Step 3: a worm in memory" id="{e7ab7d2d-28f6-df47-aee2-72308428a54f}">
+          <p14:sldIdLst>
             <p14:sldId id="269"/>
             <p14:sldId id="270"/>
             <p14:sldId id="271"/>
             <p14:sldId id="272"/>
             <p14:sldId id="273"/>
             <p14:sldId id="274"/>
+          </p14:sldIdLst>
+        </p14:section>
+        <p14:section name="Step 4: rules" id="{a2057343-8606-518d-1d28-4cfab77df613}">
+          <p14:sldIdLst>
             <p14:sldId id="275"/>
             <p14:sldId id="276"/>
             <p14:sldId id="277"/>
@@ -177,12 +193,16 @@
             <p14:sldId id="281"/>
             <p14:sldId id="282"/>
             <p14:sldId id="283"/>
+          </p14:sldIdLst>
+        </p14:section>
+        <p14:section name="Step 5: look at memory move" id="{3c22135c-c620-60d9-4471-9cfb01532339}">
+          <p14:sldIdLst>
             <p14:sldId id="284"/>
             <p14:sldId id="285"/>
             <p14:sldId id="286"/>
           </p14:sldIdLst>
         </p14:section>
-        <p14:section name="Run it and test it" id="{fbd6703c-eed0-2f21-52c1-63ea1baa2df1}">
+        <p14:section name="Run it and test it" id="{c38e4c09-9771-45f5-178c-730c6007fbfa}">
           <p14:sldIdLst>
             <p14:sldId id="287"/>
             <p14:sldId id="288"/>
@@ -191,7 +211,7 @@
             <p14:sldId id="291"/>
           </p14:sldIdLst>
         </p14:section>
-        <p14:section name="Exercises" id="{6141776f-9118-c9f3-a130-a1bcf39361f1}">
+        <p14:section name="Exercises" id="{a94a46b5-e63f-55be-268b-5a44ed6a2353}">
           <p14:sldIdLst>
             <p14:sldId id="292"/>
           </p14:sldIdLst>
@@ -1489,7 +1509,7 @@
           <a:p>
             <a:r>
               <a:rPr lang="en-US" dirty="0"/>
-              <a:t>Run it and press A: a worm of three cells in row 12, with the brighter head on the right, and the food in a random cell. Now look at memory with the debugger. At the address of body_x the first bytes are 03 04 05. In the map, at row 12 times 40 plus 3, there are three bytes at 01 in a sea of zeros. You are looking at the two structures of slide 7 and slide 8, filled.
+              <a:t>Run it and press A: a worm of three cells in row 12, with the brighter head on the right, and the food in a random cell. Now look at memory with the debugger. At the address of body_x the first bytes are 03 04 05. In the map, at row 12 times 40 plus 3, there are three bytes at 01 in a sea of zeros. You are looking at the two structures of the lecture deck, the ring and the map, filled.
 For the lecturer: To find the address of body_x: break at the start of draw_worm and step until la t0, body_x has run; t0 holds it. grid is 512 bytes after body_x; row 12 starts 480 bytes after grid.</a:t>
             </a:r>
             <a:endParaRPr lang="en-US" dirty="0"/>
@@ -4815,7 +4835,63 @@
       </p:sp>
       <p:sp>
         <p:nvSpPr>
-          <p:cNvPr id="12" name="Shape 10"/>
+          <p:cNvPr id="12" name="Text 10"/>
+          <p:cNvSpPr txBox="1"/>
+          <p:nvPr/>
+        </p:nvSpPr>
+        <p:spPr>
+          <a:xfrm>
+            <a:off x="4693615" y="566928"/>
+            <a:ext cx="6949440" cy="640080"/>
+          </a:xfrm>
+          <a:prstGeom prst="rect">
+            <a:avLst/>
+          </a:prstGeom>
+          <a:noFill/>
+          <a:ln/>
+        </p:spPr>
+        <p:txBody>
+          <a:bodyPr wrap="square" lIns="0" tIns="0" rIns="0" bIns="0" rtlCol="0" anchor="t"/>
+          <a:lstStyle/>
+          <a:p>
+            <a:pPr algn="r" indent="0" marL="0">
+              <a:buNone/>
+            </a:pPr>
+            <a:r>
+              <a:rPr lang="en-US" sz="1300" dirty="0">
+                <a:solidFill>
+                  <a:srgbClr val="CFE3EA"/>
+                </a:solidFill>
+                <a:latin typeface="Calibri" pitchFamily="34" charset="0"/>
+                <a:ea typeface="Calibri" pitchFamily="34" charset="-122"/>
+                <a:cs typeface="Calibri" pitchFamily="34" charset="-120"/>
+              </a:rPr>
+              <a:t>Code deck. The concepts, the figures and the questions are in the lecture deck:</a:t>
+            </a:r>
+            <a:endParaRPr lang="en-US" sz="1300" dirty="0"/>
+          </a:p>
+          <a:p>
+            <a:pPr algn="r" indent="0" marL="0">
+              <a:buNone/>
+            </a:pPr>
+            <a:r>
+              <a:rPr lang="en-US" sz="1300" dirty="0">
+                <a:solidFill>
+                  <a:srgbClr val="CFE3EA"/>
+                </a:solidFill>
+                <a:latin typeface="Calibri" pitchFamily="34" charset="0"/>
+                <a:ea typeface="Calibri" pitchFamily="34" charset="-122"/>
+                <a:cs typeface="Calibri" pitchFamily="34" charset="-120"/>
+              </a:rPr>
+              <a:t>17-Computer_Architecture-Verm1_Part_3.pptx</a:t>
+            </a:r>
+            <a:endParaRPr lang="en-US" sz="1300" dirty="0"/>
+          </a:p>
+        </p:txBody>
+      </p:sp>
+      <p:sp>
+        <p:nvSpPr>
+          <p:cNvPr id="13" name="Shape 11"/>
           <p:cNvSpPr/>
           <p:nvPr/>
         </p:nvSpPr>
@@ -4842,7 +4918,7 @@
       </p:sp>
       <p:pic>
         <p:nvPicPr>
-          <p:cNvPr id="13" name="Image 0" descr="/Users/raffaelemontella/devel/riscv-prg32/computer-architecture-with-prg32/tools/assets/verm1_p3_play.png">    </p:cNvPr>
+          <p:cNvPr id="14" name="Image 0" descr="/Users/raffaelemontella/devel/riscv-prg32/computer-architecture-with-prg32/tools/assets/verm1_p3_play.png">    </p:cNvPr>
           <p:cNvPicPr>
             <a:picLocks noChangeAspect="1"/>
           </p:cNvPicPr>

--- a/en/slides/17-Computer_Architecture-Verm1_Part_3-Code.pptx
+++ b/en/slides/17-Computer_Architecture-Verm1_Part_3-Code.pptx
@@ -143,25 +143,25 @@
   <p:extLst>
     <p:ext uri="{521415D9-36F7-43E2-AB2F-B90AF26B5E84}">
       <p14:sectionLst xmlns:p14="http://schemas.microsoft.com/office/powerpoint/2010/main">
-        <p14:section name="Opening" id="{f93728c4-6402-aedd-8225-cd29b73c0dd4}">
+        <p14:section name="Opening" id="{0cdc2486-9042-7b9a-fe47-d46754333ed5}">
           <p14:sldIdLst>
             <p14:sldId id="256"/>
             <p14:sldId id="257"/>
           </p14:sldIdLst>
         </p14:section>
-        <p14:section name="The listings" id="{9c3af936-509a-25cf-0f4e-999406e8c49f}">
+        <p14:section name="The listings" id="{7002814b-2c3d-dafb-ad90-66477ad367a5}">
           <p14:sldIdLst>
             <p14:sldId id="258"/>
           </p14:sldIdLst>
         </p14:section>
-        <p14:section name="Step 1: the memory of the game" id="{579a7a97-c214-61fd-c5ba-e31a00b7f496}">
+        <p14:section name="Step 1: the memory of the game" id="{2c571566-ed84-b73c-53c1-08e807e0eddd}">
           <p14:sldIdLst>
             <p14:sldId id="259"/>
             <p14:sldId id="260"/>
             <p14:sldId id="261"/>
           </p14:sldIdLst>
         </p14:section>
-        <p14:section name="Step 2: three states" id="{5570f669-3e16-f769-b7fb-01cd3d276d3c}">
+        <p14:section name="Step 2: three states" id="{ce257280-36d2-479f-671f-3815c144c4aa}">
           <p14:sldIdLst>
             <p14:sldId id="262"/>
             <p14:sldId id="263"/>
@@ -172,7 +172,7 @@
             <p14:sldId id="268"/>
           </p14:sldIdLst>
         </p14:section>
-        <p14:section name="Step 3: a worm in memory" id="{e7ab7d2d-28f6-df47-aee2-72308428a54f}">
+        <p14:section name="Step 3: a worm in memory" id="{74eeb315-447c-b6b6-270b-96466c7da374}">
           <p14:sldIdLst>
             <p14:sldId id="269"/>
             <p14:sldId id="270"/>
@@ -182,7 +182,7 @@
             <p14:sldId id="274"/>
           </p14:sldIdLst>
         </p14:section>
-        <p14:section name="Step 4: rules" id="{a2057343-8606-518d-1d28-4cfab77df613}">
+        <p14:section name="Step 4: rules" id="{f900dbac-55b4-7243-331f-85926c77eceb}">
           <p14:sldIdLst>
             <p14:sldId id="275"/>
             <p14:sldId id="276"/>
@@ -195,14 +195,14 @@
             <p14:sldId id="283"/>
           </p14:sldIdLst>
         </p14:section>
-        <p14:section name="Step 5: look at memory move" id="{3c22135c-c620-60d9-4471-9cfb01532339}">
+        <p14:section name="Step 5: look at memory move" id="{07607f92-4ba0-dab9-b522-f0f2ac55826f}">
           <p14:sldIdLst>
             <p14:sldId id="284"/>
             <p14:sldId id="285"/>
             <p14:sldId id="286"/>
           </p14:sldIdLst>
         </p14:section>
-        <p14:section name="Run it and test it" id="{c38e4c09-9771-45f5-178c-730c6007fbfa}">
+        <p14:section name="Run it and test it" id="{5e98c29e-0f47-5a3a-772f-a7738a2402ac}">
           <p14:sldIdLst>
             <p14:sldId id="287"/>
             <p14:sldId id="288"/>
@@ -211,7 +211,7 @@
             <p14:sldId id="291"/>
           </p14:sldIdLst>
         </p14:section>
-        <p14:section name="Exercises" id="{a94a46b5-e63f-55be-268b-5a44ed6a2353}">
+        <p14:section name="Exercises" id="{809db2a7-1d89-e2ca-0ab6-bd364af84619}">
           <p14:sldIdLst>
             <p14:sldId id="292"/>
           </p14:sldIdLst>
@@ -620,7 +620,9 @@
           <a:p>
             <a:r>
               <a:rPr lang="en-US" dirty="0"/>
-              <a:t>This is the code deck of Lecture 17. The lecture deck holds the concepts; this one holds everything you type and run: the listings with their explanation, the complete program, what it shows, and the way to test it on each of the three hosts.</a:t>
+              <a:t>This is the code deck of Lecture 17. The lecture deck holds the concepts; this one holds everything you type and run: the listings with their explanation, the complete program, what it shows, and the way to test it on each of the three hosts.
+Learning status: UNDERSTAND NOW, by the end of this lecture you explain it, trace it and apply it on your own; USE NOW, you follow and use the recipe today; how it works inside is explained later, or is not part of the course; UNDERSTAND LATER, recognise the name and what it is for; a later lecture explains it. A slide without a badge is context: a story, an example, a question, an exercise.
+Learning status of this lecture. UNDERSTAND NOW: arrays in memory; finite-state machines; .text, .rodata, .data; latches and flip-flops; fixed point. USE NOW: the calling convention (Lecture 18) and, used without being studied in this course, the PRG32 tools, the PRG32-QT debugger. UNDERSTAND LATER: nothing. A slide without a badge is context: a story, an example, a question, an exercise.</a:t>
             </a:r>
             <a:endParaRPr lang="en-US" dirty="0"/>
           </a:p>
@@ -709,6 +711,7 @@
             <a:r>
               <a:rPr lang="en-US" dirty="0"/>
               <a:t>verm1_draw shows a different picture in each state. The title line is always drawn. In TITLE only the invitation PRESS A appears, centred: 132 is the x that centres seven characters of 8 pixels. In PLAY and OVER the function draws the score, the worm and the food. Note that draw changes nothing: its output depends only on the state and on the memory, as in a Moore machine.
+UNDERSTAND NOW: finite-state machines.
 For the lecturer: Replace verm1_draw. The output depends only on the state and on the memory: draw changes nothing.</a:t>
             </a:r>
             <a:endParaRPr lang="en-US" dirty="0"/>
@@ -798,6 +801,7 @@
             <a:r>
               <a:rPr lang="en-US" dirty="0"/>
               <a:t>The end of verm1_draw: in the state OVER two words are written over the scene. A small helper, draw_text, fills in the two colour arguments, white on black, and passes the first three through, so that each call to draw text needs two lines less. Small helpers like this make a program shorter and easier to change.
+UNDERSTAND NOW: finite-state machines.
 For the lecturer: The end of verm1_draw, and a small helper that removes two lines from every text call.</a:t>
             </a:r>
             <a:endParaRPr lang="en-US" dirty="0"/>
@@ -1065,6 +1069,7 @@
             <a:r>
               <a:rPr lang="en-US" dirty="0"/>
               <a:t>The first half of the real new_game. A loop sets the 960 bytes of the map to zero, one sb at a time. Then the worm is laid down: three segments in columns 3, 4 and 5 of row 12. Each segment is written twice: its column and row in the ring, and a 1 in the map. The expression grid+12*COLS is computed by the assembler. Since each entry is one byte, the index is added to the base address without any shift.
+UNDERSTAND NOW: arrays in memory.
 For the lecturer: grid+12*COLS is computed by the assembler: the address of the first byte of row 12. sb stores one byte; the index is added to the base address, with no shift because each entry is one byte.</a:t>
             </a:r>
             <a:endParaRPr lang="en-US" dirty="0"/>
@@ -1154,6 +1159,7 @@
             <a:r>
               <a:rPr lang="en-US" dirty="0"/>
               <a:t>The second half sets the variables: head_i is 2 and length is 3, which together describe the worm just laid; direction, timer and score start from zero; the first food is placed. The last instruction stores PLAY in the state. The order is deliberate: the transition is complete only when everything is ready.
+UNDERSTAND NOW: arrays in memory.
 For the lecturer: The second half of new_game. The transition TITLE to PLAY is complete only when everything is ready: the state is stored last.</a:t>
             </a:r>
             <a:endParaRPr lang="en-US" dirty="0"/>
@@ -1243,6 +1249,7 @@
             <a:r>
               <a:rPr lang="en-US" dirty="0"/>
               <a:t>draw_worm walks the ring backwards from the head: segment number i is entry head_i - i, masked with 255. Column and row are loaded with lbu, which reads one byte as an unsigned number, and passed to draw_cell. Segment 0, the head, is drawn in a brighter green than the others. The loop ends when i reaches the length.
+UNDERSTAND NOW: arrays in memory.
 For the lecturer: lbu and not lb: a column is a number from 0 to 39, never negative. With lb a byte of 200 or more would become negative: Lecture 05. Here both would work; lbu says what we mean.</a:t>
             </a:r>
             <a:endParaRPr lang="en-US" dirty="0"/>
@@ -1332,6 +1339,7 @@
             <a:r>
               <a:rPr lang="en-US" dirty="0"/>
               <a:t>draw_score is the loop that in Part 2 was inside verm1_draw, now a function of its own: one small mark for each point. It uses s0 as its counter, so it saves it at the beginning and restores it at the end.
+USE NOW: the calling convention (studied in Lecture 18).
 For the lecturer: The same loop that was inside verm1_draw in Part 2.</a:t>
             </a:r>
             <a:endParaRPr lang="en-US" dirty="0"/>
@@ -1688,6 +1696,7 @@
             <a:r>
               <a:rPr lang="en-US" dirty="0"/>
               <a:t>play_update is your verm1_update of Part 2 under a new name: the four button tests and the U-turn rule. One difference: the buttons arrive as an argument in a0, so there is no call to read them.
+UNDERSTAND NOW: fixed point.
 For the lecturer: Take the body of the old verm1_update: remove the call to prg32_input_read and rename the function.</a:t>
             </a:r>
             <a:endParaRPr lang="en-US" dirty="0"/>
@@ -1777,6 +1786,7 @@
             <a:r>
               <a:rPr lang="en-US" dirty="0"/>
               <a:t>The end of play_update is exactly the timer of Part 2: add the speed, and when a whole cell has accumulated call step.
+UNDERSTAND NOW: fixed point.
 For the lecturer: The end of play_update.</a:t>
             </a:r>
             <a:endParaRPr lang="en-US" dirty="0"/>
@@ -1866,6 +1876,7 @@
             <a:r>
               <a:rPr lang="en-US" dirty="0"/>
               <a:t>The beginning of step. Three registers must keep their values across the calls that follow: s0 and s1 for the cell of the new head, s2 for the result of the food test. So the frame saves ra and three s registers. The lookup of dx and dy is that of Part 2.
+USE NOW: the calling convention (studied in Lecture 18).
 For the lecturer: The frame has room for four words: ra and three saved registers.</a:t>
             </a:r>
             <a:endParaRPr lang="en-US" dirty="0"/>
@@ -1955,6 +1966,7 @@
             <a:r>
               <a:rPr lang="en-US" dirty="0"/>
               <a:t>Where will the head be? The present head is entry head_i of the ring: its column and row are loaded with lbu, dx and dy are added, and the result wraps at the edges as in Part 2. The new cell is now in s0 and s1. Nothing has been written: first the program must look.
+UNDERSTAND NOW: arrays in memory.
 For the lecturer: The new cell is only computed, in s0 and s1. Writing it comes after the collision test.</a:t>
             </a:r>
             <a:endParaRPr lang="en-US" dirty="0"/>
@@ -2044,6 +2056,7 @@
             <a:r>
               <a:rPr lang="en-US" dirty="0"/>
               <a:t>Eat, or move the tail. The comparator of Part 2 leaves its result in s2: zero if the new head is on the food. If the worm eats, the length grows by one and the tail stays where it is. If not, the tail must leave: its entry is head_i - length + 1, and its column and row are loaded. Growing and not moving the tail are the same thing: that is the whole trick of Snake.
+UNDERSTAND NOW: arrays in memory.
 For the lecturer: Growing and not moving the tail are the same thing: this is the whole trick of Snake. t3 and t4 receive the column and row of the tail.</a:t>
             </a:r>
             <a:endParaRPr lang="en-US" dirty="0"/>
@@ -2133,6 +2146,7 @@
             <a:r>
               <a:rPr lang="en-US" dirty="0"/>
               <a:t>Now the map. The number of a byte is row times 40 plus column, computed with mul and add. First the byte of the tail is cleared; then the byte of the new head is tested. The order matters: in the same step the tail moves away, so the head may enter the cell that the tail has just left. If the byte is 1 the worm has bitten itself: the state becomes OVER and the best score is updated.
+UNDERSTAND NOW: arrays in memory.
 For the lecturer: The order matters: freeing the tail before the test allows the worm to chase its own tail, as in the original game. mul needs the M extension of RISC-V, which the ESP32-C6 has.</a:t>
             </a:r>
             <a:endParaRPr lang="en-US" dirty="0"/>
@@ -2222,6 +2236,7 @@
             <a:r>
               <a:rPr lang="en-US" dirty="0"/>
               <a:t>If the cell is free, the new head is written: a 1 in the map, head_i plus 1 masked with 255, and column and row in the new entry of the ring. Then, if s2 is zero, the reward: a point, new food, a sound. After a collision the function skips all of this, so the screen shows the worm as it was before the fatal step.
+UNDERSTAND NOW: arrays in memory.
 For the lecturer: The end of step. After a collision the function jumps straight to label 9: nothing is written, and the screen shows the worm as it was before the fatal step.</a:t>
             </a:r>
             <a:endParaRPr lang="en-US" dirty="0"/>
@@ -2311,6 +2326,7 @@
             <a:r>
               <a:rPr lang="en-US" dirty="0"/>
               <a:t>place_food is corrected: it draws a random cell, looks at its byte in the map, and if the cell is occupied draws again, until a free one comes out. The column waits in s0 while the second random number is requested. The loop is short: even with the longest worm fewer than two attempts are needed on average.
+USE NOW: the calling convention (studied in Lecture 18).
 For the lecturer: Replace place_food of Part 2. The loop ends quickly as long as the worm is short: with 255 cells out of 960 the average is fewer than two attempts.</a:t>
             </a:r>
             <a:endParaRPr lang="en-US" dirty="0"/>
@@ -2578,6 +2594,7 @@
             <a:r>
               <a:rPr lang="en-US" dirty="0"/>
               <a:t>The usual two commands. Today the file changes a great deal, so do not wait until the end to build: build and run after every slide entitled "Run it". If something breaks, the mistake is in the lines added since the last run.
+USE NOW: the PRG32 tools (used, not studied, in this course).
 For the lecturer: The same two commands. Today the file changes a lot: build after every slide that says Run it, not only at the end.</a:t>
             </a:r>
             <a:endParaRPr lang="en-US" dirty="0"/>
@@ -2932,6 +2949,7 @@
             <a:r>
               <a:rPr lang="en-US" dirty="0"/>
               <a:t>The quickest way: PRG32-QT on your own computer. Four steps, each with its command. PRG32-QT behaves like a board on port 8080, which is why the upload command says esp32c6. With debug mode enabled you can stop at any instruction and read registers and memory.
+USE NOW: the PRG32 tools (used, not studied, in this course).
 For the lecturer: Run by the tests: the cartridge of this slide is built with this command and executed on the headless runner of PRG32-QT. Without the toolchain: import the .prg32 file in PRG32-QT and choose Run Cartridge. Keys: arrows or WASD for the joystick, Z or J for A, X or K for B, Enter for Start, Escape to go back to Setup.</a:t>
             </a:r>
             <a:endParaRPr lang="en-US" dirty="0"/>
@@ -3021,6 +3039,7 @@
             <a:r>
               <a:rPr lang="en-US" dirty="0"/>
               <a:t>The same program on the emulator. QEMU runs the real firmware on an emulated chip, so the cartridge must be built for the architecture qemu. Stage the cartridge while QEMU is closed. The firmware opens on the Setup menu: choose Run Cartridge and the slot. Remember that the keyboard is read by the terminal, not by the window with the picture.
+USE NOW: the PRG32 tools (used, not studied, in this course).
 For the lecturer: Checked by the tests up to the staging: the cartridge is built for the architecture qemu and accepted into the flash image of the emulator. What the emulator then shows is not checked automatically: Espressif QEMU needs its window. Since October 2026 the firmware starts on Setup: choose Run Cartridge, then cart0.</a:t>
             </a:r>
             <a:endParaRPr lang="en-US" dirty="0"/>
@@ -3110,6 +3129,7 @@
             <a:r>
               <a:rPr lang="en-US" dirty="0"/>
               <a:t>The same program on the kit. The firmware is written once, through USB; after that cartridges travel over Wi-Fi. The upload command is the one used for PRG32-QT with the address of the board. This is the only host that the automatic tests do not run: try it, and report what you see.
+USE NOW: the PRG32 tools (used, not studied, in this course).
 For the lecturer: Not run by the tests: there is no board on the test machine. The cartridge for the architecture esp32c6 is built by the tests; the steps are those of the PRG32 documentation. If the serial port is not found pass it explicitly. To use the Wi-Fi of the classroom: python3 -m prg32 wifi set --ssid NAME --password PASSWORD --mode sta.</a:t>
             </a:r>
             <a:endParaRPr lang="en-US" dirty="0"/>
@@ -3199,6 +3219,7 @@
             <a:r>
               <a:rPr lang="en-US" dirty="0"/>
               <a:t>The five most common symptoms, what each means, and what to do. Read the message before changing anything: it nearly always names the cause.
+USE NOW: the PRG32 tools (used, not studied, in this course).
 For the lecturer: The first three rows cover most cases. When asking for help, paste the command and the whole message as text. docs/usage/troubleshooting.md of the PRG32 repository has the complete list.</a:t>
             </a:r>
             <a:endParaRPr lang="en-US" dirty="0"/>
@@ -3377,6 +3398,7 @@
             <a:r>
               <a:rPr lang="en-US" dirty="0"/>
               <a:t>The new constants replace those of Part 2. BODY is a darker green for the segments behind the head. BTN_A is the mask of button A, bit 4 of the word of buttons. The three states are simply the numbers 0, 1 and 2, with names. The lines .section and .global, which used to close this block, move to the next slide.
+UNDERSTAND NOW: finite-state machines.
 For the lecturer: Replace the constants of Part 2.</a:t>
             </a:r>
             <a:endParaRPr lang="en-US" dirty="0"/>
@@ -3466,6 +3488,7 @@
             <a:r>
               <a:rPr lang="en-US" dirty="0"/>
               <a:t>The read-only section: three strings, for the title, the invitation and the game over, and the two tables dx and dy of Part 2. The program never writes here. On the board this section could remain in flash; it is the part of the cartridge that would survive a power-off.
+UNDERSTAND NOW: .text, .rodata, .data.
 For the lecturer: Replace the .rodata of Part 2.</a:t>
             </a:r>
             <a:endParaRPr lang="en-US" dirty="0"/>
@@ -3555,6 +3578,7 @@
             <a:r>
               <a:rPr lang="en-US" dirty="0"/>
               <a:t>The section of variables. head_x and head_y have disappeared: the head now lives in the ring. The directive .space reserves a number of bytes without naming each one: 256 for body_x, 256 for body_y, 960 for the map. best holds the best score: it survives from one game to the next, but not a power-off, because it lives in RAM. A portable cartridge has no permanent memory of its own: an honest limit.
+UNDERSTAND NOW: .text, .rodata, .data.
 For the lecturer: Replace the .data of Part 2. Everything here is lost when the cartridge is unloaded: Lecture 16. A best score that survives needs permanent memory, which a portable cartridge does not have: an honest limit.</a:t>
             </a:r>
             <a:endParaRPr lang="en-US" dirty="0"/>
@@ -3644,6 +3668,7 @@
             <a:r>
               <a:rPr lang="en-US" dirty="0"/>
               <a:t>verm1_init now does one thing only: it chooses the first state, TITLE. Preparing the game is the job of a new function, new_game, called when the player presses A. Delete from your file the old verm1_update, step and verm1_draw: the next slides replace them. Keep place_food, eat_sound and draw_cell.
+UNDERSTAND NOW: finite-state machines.
 For the lecturer: Replace verm1_init. Delete from your file verm1_update, step and verm1_draw of Part 2: the next slides replace them. Keep place_food, eat_sound and draw_cell.</a:t>
             </a:r>
             <a:endParaRPr lang="en-US" dirty="0"/>
@@ -3733,6 +3758,7 @@
             <a:r>
               <a:rPr lang="en-US" dirty="0"/>
               <a:t>The first half of the new verm1_update reads the buttons and computes their edges. s0 holds the buttons of this frame; prev_btn, in memory, holds those of the previous frame. The expression "now AND NOT before" gives a 1 only in the positions where a press has just begun, and the result goes into s1. Then prev_btn is updated. It is the edge detector of Lecture 13: a register that delays by one clock, and an AND gate with one input inverted.
+UNDERSTAND NOW: latches and flip-flops. USE NOW: the calling convention (studied in Lecture 18).
 For the lecturer: The edge detector of Lecture 13: a flip-flop and an AND gate with one inverted input. Here the flip-flop is a word of memory and the clock is the frame.</a:t>
             </a:r>
             <a:endParaRPr lang="en-US" dirty="0"/>
@@ -3822,6 +3848,7 @@
             <a:r>
               <a:rPr lang="en-US" dirty="0"/>
               <a:t>The second half is the transition table, line by line. The state is read first, and it decides who looks at the inputs. In TITLE a new press of A calls new_game. In OVER a new press of A stores TITLE. In PLAY the buttons that are held, the levels and not the edges, are passed to play_update, because steering must work while a button is kept down. The labels have names here, u_play, u_start, u_done, because numbers would be hard to follow.
+UNDERSTAND NOW: finite-state machines.
 For the lecturer: This is the rest of verm1_update: the transition table, line by line. OVER to TITLE only stores the new state; TITLE to PLAY calls new_game, which stores PLAY itself.</a:t>
             </a:r>
             <a:endParaRPr lang="en-US" dirty="0"/>
@@ -4942,6 +4969,420 @@
       </p:pic>
       <p:sp>
         <p:nvSpPr>
+          <p:cNvPr id="15" name="Shape 12"/>
+          <p:cNvSpPr/>
+          <p:nvPr/>
+        </p:nvSpPr>
+        <p:spPr>
+          <a:xfrm>
+            <a:off x="9690303" y="91440"/>
+            <a:ext cx="1952752" cy="274320"/>
+          </a:xfrm>
+          <a:prstGeom prst="rect">
+            <a:avLst/>
+          </a:prstGeom>
+          <a:solidFill>
+            <a:srgbClr val="F3E8FF"/>
+          </a:solidFill>
+          <a:ln w="12700">
+            <a:solidFill>
+              <a:srgbClr val="7E22CE"/>
+            </a:solidFill>
+            <a:prstDash val="dash"/>
+          </a:ln>
+        </p:spPr>
+      </p:sp>
+      <p:sp>
+        <p:nvSpPr>
+          <p:cNvPr id="16" name="Shape 13"/>
+          <p:cNvSpPr/>
+          <p:nvPr/>
+        </p:nvSpPr>
+        <p:spPr>
+          <a:xfrm>
+            <a:off x="9717735" y="128016"/>
+            <a:ext cx="45720" cy="45720"/>
+          </a:xfrm>
+          <a:prstGeom prst="rect">
+            <a:avLst/>
+          </a:prstGeom>
+          <a:solidFill>
+            <a:srgbClr val="7E22CE"/>
+          </a:solidFill>
+          <a:ln w="12700">
+            <a:solidFill>
+              <a:srgbClr val="7E22CE"/>
+            </a:solidFill>
+            <a:prstDash val="solid"/>
+          </a:ln>
+        </p:spPr>
+      </p:sp>
+      <p:sp>
+        <p:nvSpPr>
+          <p:cNvPr id="17" name="Shape 14"/>
+          <p:cNvSpPr/>
+          <p:nvPr/>
+        </p:nvSpPr>
+        <p:spPr>
+          <a:xfrm>
+            <a:off x="9717735" y="205740"/>
+            <a:ext cx="45720" cy="45720"/>
+          </a:xfrm>
+          <a:prstGeom prst="rect">
+            <a:avLst/>
+          </a:prstGeom>
+          <a:solidFill>
+            <a:srgbClr val="7E22CE"/>
+          </a:solidFill>
+          <a:ln w="12700">
+            <a:solidFill>
+              <a:srgbClr val="7E22CE"/>
+            </a:solidFill>
+            <a:prstDash val="solid"/>
+          </a:ln>
+        </p:spPr>
+      </p:sp>
+      <p:sp>
+        <p:nvSpPr>
+          <p:cNvPr id="18" name="Shape 15"/>
+          <p:cNvSpPr/>
+          <p:nvPr/>
+        </p:nvSpPr>
+        <p:spPr>
+          <a:xfrm>
+            <a:off x="9717735" y="283464"/>
+            <a:ext cx="45720" cy="45720"/>
+          </a:xfrm>
+          <a:prstGeom prst="rect">
+            <a:avLst/>
+          </a:prstGeom>
+          <a:solidFill>
+            <a:srgbClr val="7E22CE"/>
+          </a:solidFill>
+          <a:ln w="12700">
+            <a:solidFill>
+              <a:srgbClr val="7E22CE"/>
+            </a:solidFill>
+            <a:prstDash val="solid"/>
+          </a:ln>
+        </p:spPr>
+      </p:sp>
+      <p:pic>
+        <p:nvPicPr>
+          <p:cNvPr id="19" name="Image 1" descr="preencoded.png">    </p:cNvPr>
+          <p:cNvPicPr>
+            <a:picLocks noChangeAspect="1"/>
+          </p:cNvPicPr>
+          <p:nvPr/>
+        </p:nvPicPr>
+        <p:blipFill>
+          <a:blip r:embed="rId2"/>
+          <a:stretch>
+            <a:fillRect/>
+          </a:stretch>
+        </p:blipFill>
+        <p:spPr>
+          <a:xfrm>
+            <a:off x="9818319" y="128016"/>
+            <a:ext cx="201168" cy="201168"/>
+          </a:xfrm>
+          <a:prstGeom prst="rect">
+            <a:avLst/>
+          </a:prstGeom>
+        </p:spPr>
+      </p:pic>
+      <p:sp>
+        <p:nvSpPr>
+          <p:cNvPr id="20" name="Text 16"/>
+          <p:cNvSpPr txBox="1"/>
+          <p:nvPr/>
+        </p:nvSpPr>
+        <p:spPr>
+          <a:xfrm>
+            <a:off x="10074351" y="91440"/>
+            <a:ext cx="1532128" cy="274320"/>
+          </a:xfrm>
+          <a:prstGeom prst="rect">
+            <a:avLst/>
+          </a:prstGeom>
+          <a:noFill/>
+          <a:ln/>
+        </p:spPr>
+        <p:txBody>
+          <a:bodyPr wrap="square" lIns="0" tIns="0" rIns="0" bIns="0" rtlCol="0" anchor="ctr"/>
+          <a:lstStyle/>
+          <a:p>
+            <a:pPr indent="0" marL="0">
+              <a:buNone/>
+            </a:pPr>
+            <a:r>
+              <a:rPr lang="en-US" sz="1100" b="1" dirty="0">
+                <a:solidFill>
+                  <a:srgbClr val="6B21A8"/>
+                </a:solidFill>
+                <a:latin typeface="Calibri" pitchFamily="34" charset="0"/>
+                <a:ea typeface="Calibri" pitchFamily="34" charset="-122"/>
+                <a:cs typeface="Calibri" pitchFamily="34" charset="-120"/>
+              </a:rPr>
+              <a:t>UNDERSTAND LATER</a:t>
+            </a:r>
+            <a:endParaRPr lang="en-US" sz="1100" dirty="0"/>
+          </a:p>
+        </p:txBody>
+      </p:sp>
+      <p:sp>
+        <p:nvSpPr>
+          <p:cNvPr id="21" name="Shape 17"/>
+          <p:cNvSpPr/>
+          <p:nvPr/>
+        </p:nvSpPr>
+        <p:spPr>
+          <a:xfrm>
+            <a:off x="8407349" y="91440"/>
+            <a:ext cx="1173226" cy="274320"/>
+          </a:xfrm>
+          <a:prstGeom prst="rect">
+            <a:avLst/>
+          </a:prstGeom>
+          <a:solidFill>
+            <a:srgbClr val="FEF3C7"/>
+          </a:solidFill>
+          <a:ln w="12700">
+            <a:solidFill>
+              <a:srgbClr val="B45309"/>
+            </a:solidFill>
+            <a:prstDash val="solid"/>
+          </a:ln>
+        </p:spPr>
+      </p:sp>
+      <p:sp>
+        <p:nvSpPr>
+          <p:cNvPr id="22" name="Shape 18"/>
+          <p:cNvSpPr/>
+          <p:nvPr/>
+        </p:nvSpPr>
+        <p:spPr>
+          <a:xfrm>
+            <a:off x="8407349" y="91440"/>
+            <a:ext cx="27432" cy="274320"/>
+          </a:xfrm>
+          <a:prstGeom prst="rect">
+            <a:avLst/>
+          </a:prstGeom>
+          <a:solidFill>
+            <a:srgbClr val="B45309"/>
+          </a:solidFill>
+          <a:ln w="12700">
+            <a:solidFill>
+              <a:srgbClr val="B45309"/>
+            </a:solidFill>
+            <a:prstDash val="solid"/>
+          </a:ln>
+        </p:spPr>
+      </p:sp>
+      <p:sp>
+        <p:nvSpPr>
+          <p:cNvPr id="23" name="Shape 19"/>
+          <p:cNvSpPr/>
+          <p:nvPr/>
+        </p:nvSpPr>
+        <p:spPr>
+          <a:xfrm>
+            <a:off x="8462213" y="91440"/>
+            <a:ext cx="27432" cy="274320"/>
+          </a:xfrm>
+          <a:prstGeom prst="rect">
+            <a:avLst/>
+          </a:prstGeom>
+          <a:solidFill>
+            <a:srgbClr val="B45309"/>
+          </a:solidFill>
+          <a:ln w="12700">
+            <a:solidFill>
+              <a:srgbClr val="B45309"/>
+            </a:solidFill>
+            <a:prstDash val="solid"/>
+          </a:ln>
+        </p:spPr>
+      </p:sp>
+      <p:pic>
+        <p:nvPicPr>
+          <p:cNvPr id="24" name="Image 2" descr="preencoded.png">    </p:cNvPr>
+          <p:cNvPicPr>
+            <a:picLocks noChangeAspect="1"/>
+          </p:cNvPicPr>
+          <p:nvPr/>
+        </p:nvPicPr>
+        <p:blipFill>
+          <a:blip r:embed="rId3"/>
+          <a:stretch>
+            <a:fillRect/>
+          </a:stretch>
+        </p:blipFill>
+        <p:spPr>
+          <a:xfrm>
+            <a:off x="8535365" y="128016"/>
+            <a:ext cx="201168" cy="201168"/>
+          </a:xfrm>
+          <a:prstGeom prst="rect">
+            <a:avLst/>
+          </a:prstGeom>
+        </p:spPr>
+      </p:pic>
+      <p:sp>
+        <p:nvSpPr>
+          <p:cNvPr id="25" name="Text 20"/>
+          <p:cNvSpPr txBox="1"/>
+          <p:nvPr/>
+        </p:nvSpPr>
+        <p:spPr>
+          <a:xfrm>
+            <a:off x="8791397" y="91440"/>
+            <a:ext cx="752602" cy="274320"/>
+          </a:xfrm>
+          <a:prstGeom prst="rect">
+            <a:avLst/>
+          </a:prstGeom>
+          <a:noFill/>
+          <a:ln/>
+        </p:spPr>
+        <p:txBody>
+          <a:bodyPr wrap="square" lIns="0" tIns="0" rIns="0" bIns="0" rtlCol="0" anchor="ctr"/>
+          <a:lstStyle/>
+          <a:p>
+            <a:pPr indent="0" marL="0">
+              <a:buNone/>
+            </a:pPr>
+            <a:r>
+              <a:rPr lang="en-US" sz="1100" b="1" dirty="0">
+                <a:solidFill>
+                  <a:srgbClr val="92400E"/>
+                </a:solidFill>
+                <a:latin typeface="Calibri" pitchFamily="34" charset="0"/>
+                <a:ea typeface="Calibri" pitchFamily="34" charset="-122"/>
+                <a:cs typeface="Calibri" pitchFamily="34" charset="-120"/>
+              </a:rPr>
+              <a:t>USE NOW</a:t>
+            </a:r>
+            <a:endParaRPr lang="en-US" sz="1100" dirty="0"/>
+          </a:p>
+        </p:txBody>
+      </p:sp>
+      <p:sp>
+        <p:nvSpPr>
+          <p:cNvPr id="26" name="Shape 21"/>
+          <p:cNvSpPr/>
+          <p:nvPr/>
+        </p:nvSpPr>
+        <p:spPr>
+          <a:xfrm>
+            <a:off x="6518097" y="91440"/>
+            <a:ext cx="1779524" cy="274320"/>
+          </a:xfrm>
+          <a:prstGeom prst="rect">
+            <a:avLst/>
+          </a:prstGeom>
+          <a:solidFill>
+            <a:srgbClr val="E0F2FE"/>
+          </a:solidFill>
+          <a:ln w="12700">
+            <a:solidFill>
+              <a:srgbClr val="0369A1"/>
+            </a:solidFill>
+            <a:prstDash val="solid"/>
+          </a:ln>
+        </p:spPr>
+      </p:sp>
+      <p:sp>
+        <p:nvSpPr>
+          <p:cNvPr id="27" name="Shape 22"/>
+          <p:cNvSpPr/>
+          <p:nvPr/>
+        </p:nvSpPr>
+        <p:spPr>
+          <a:xfrm>
+            <a:off x="6518097" y="91440"/>
+            <a:ext cx="73152" cy="274320"/>
+          </a:xfrm>
+          <a:prstGeom prst="rect">
+            <a:avLst/>
+          </a:prstGeom>
+          <a:solidFill>
+            <a:srgbClr val="0369A1"/>
+          </a:solidFill>
+          <a:ln w="12700">
+            <a:solidFill>
+              <a:srgbClr val="0369A1"/>
+            </a:solidFill>
+            <a:prstDash val="solid"/>
+          </a:ln>
+        </p:spPr>
+      </p:sp>
+      <p:pic>
+        <p:nvPicPr>
+          <p:cNvPr id="28" name="Image 3" descr="preencoded.png">    </p:cNvPr>
+          <p:cNvPicPr>
+            <a:picLocks noChangeAspect="1"/>
+          </p:cNvPicPr>
+          <p:nvPr/>
+        </p:nvPicPr>
+        <p:blipFill>
+          <a:blip r:embed="rId4"/>
+          <a:stretch>
+            <a:fillRect/>
+          </a:stretch>
+        </p:blipFill>
+        <p:spPr>
+          <a:xfrm>
+            <a:off x="6646113" y="128016"/>
+            <a:ext cx="201168" cy="201168"/>
+          </a:xfrm>
+          <a:prstGeom prst="rect">
+            <a:avLst/>
+          </a:prstGeom>
+        </p:spPr>
+      </p:pic>
+      <p:sp>
+        <p:nvSpPr>
+          <p:cNvPr id="29" name="Text 23"/>
+          <p:cNvSpPr txBox="1"/>
+          <p:nvPr/>
+        </p:nvSpPr>
+        <p:spPr>
+          <a:xfrm>
+            <a:off x="6902145" y="91440"/>
+            <a:ext cx="1358900" cy="274320"/>
+          </a:xfrm>
+          <a:prstGeom prst="rect">
+            <a:avLst/>
+          </a:prstGeom>
+          <a:noFill/>
+          <a:ln/>
+        </p:spPr>
+        <p:txBody>
+          <a:bodyPr wrap="square" lIns="0" tIns="0" rIns="0" bIns="0" rtlCol="0" anchor="ctr"/>
+          <a:lstStyle/>
+          <a:p>
+            <a:pPr indent="0" marL="0">
+              <a:buNone/>
+            </a:pPr>
+            <a:r>
+              <a:rPr lang="en-US" sz="1100" b="1" dirty="0">
+                <a:solidFill>
+                  <a:srgbClr val="075985"/>
+                </a:solidFill>
+                <a:latin typeface="Calibri" pitchFamily="34" charset="0"/>
+                <a:ea typeface="Calibri" pitchFamily="34" charset="-122"/>
+                <a:cs typeface="Calibri" pitchFamily="34" charset="-120"/>
+              </a:rPr>
+              <a:t>UNDERSTAND NOW</a:t>
+            </a:r>
+            <a:endParaRPr lang="en-US" sz="1100" dirty="0"/>
+          </a:p>
+        </p:txBody>
+      </p:sp>
+      <p:sp>
+        <p:nvSpPr>
           <p:cNvPr id="25" name="Slide Number Placeholder 0"/>
           <p:cNvSpPr>
             <a:spLocks noGrp="1"/>
@@ -6027,6 +6468,133 @@
       </p:sp>
       <p:sp>
         <p:nvSpPr>
+          <p:cNvPr id="17" name="Shape 15"/>
+          <p:cNvSpPr/>
+          <p:nvPr/>
+        </p:nvSpPr>
+        <p:spPr>
+          <a:xfrm>
+            <a:off x="8287715" y="91440"/>
+            <a:ext cx="3355340" cy="274320"/>
+          </a:xfrm>
+          <a:prstGeom prst="rect">
+            <a:avLst/>
+          </a:prstGeom>
+          <a:solidFill>
+            <a:srgbClr val="E0F2FE"/>
+          </a:solidFill>
+          <a:ln w="12700">
+            <a:solidFill>
+              <a:srgbClr val="0369A1"/>
+            </a:solidFill>
+            <a:prstDash val="solid"/>
+          </a:ln>
+        </p:spPr>
+      </p:sp>
+      <p:sp>
+        <p:nvSpPr>
+          <p:cNvPr id="18" name="Shape 16"/>
+          <p:cNvSpPr/>
+          <p:nvPr/>
+        </p:nvSpPr>
+        <p:spPr>
+          <a:xfrm>
+            <a:off x="8287715" y="91440"/>
+            <a:ext cx="73152" cy="274320"/>
+          </a:xfrm>
+          <a:prstGeom prst="rect">
+            <a:avLst/>
+          </a:prstGeom>
+          <a:solidFill>
+            <a:srgbClr val="0369A1"/>
+          </a:solidFill>
+          <a:ln w="12700">
+            <a:solidFill>
+              <a:srgbClr val="0369A1"/>
+            </a:solidFill>
+            <a:prstDash val="solid"/>
+          </a:ln>
+        </p:spPr>
+      </p:sp>
+      <p:pic>
+        <p:nvPicPr>
+          <p:cNvPr id="19" name="Image 0" descr="preencoded.png">    </p:cNvPr>
+          <p:cNvPicPr>
+            <a:picLocks noChangeAspect="1"/>
+          </p:cNvPicPr>
+          <p:nvPr/>
+        </p:nvPicPr>
+        <p:blipFill>
+          <a:blip r:embed="rId1"/>
+          <a:stretch>
+            <a:fillRect/>
+          </a:stretch>
+        </p:blipFill>
+        <p:spPr>
+          <a:xfrm>
+            <a:off x="8415731" y="128016"/>
+            <a:ext cx="201168" cy="201168"/>
+          </a:xfrm>
+          <a:prstGeom prst="rect">
+            <a:avLst/>
+          </a:prstGeom>
+        </p:spPr>
+      </p:pic>
+      <p:sp>
+        <p:nvSpPr>
+          <p:cNvPr id="20" name="Text 17"/>
+          <p:cNvSpPr txBox="1"/>
+          <p:nvPr/>
+        </p:nvSpPr>
+        <p:spPr>
+          <a:xfrm>
+            <a:off x="8671763" y="91440"/>
+            <a:ext cx="2934716" cy="274320"/>
+          </a:xfrm>
+          <a:prstGeom prst="rect">
+            <a:avLst/>
+          </a:prstGeom>
+          <a:noFill/>
+          <a:ln/>
+        </p:spPr>
+        <p:txBody>
+          <a:bodyPr wrap="square" lIns="0" tIns="0" rIns="0" bIns="0" rtlCol="0" anchor="ctr"/>
+          <a:lstStyle/>
+          <a:p>
+            <a:pPr indent="0" marL="0">
+              <a:buNone/>
+            </a:pPr>
+            <a:r>
+              <a:rPr lang="en-US" sz="1100" b="1" dirty="0">
+                <a:solidFill>
+                  <a:srgbClr val="075985"/>
+                </a:solidFill>
+                <a:latin typeface="Calibri" pitchFamily="34" charset="0"/>
+                <a:ea typeface="Calibri" pitchFamily="34" charset="-122"/>
+                <a:cs typeface="Calibri" pitchFamily="34" charset="-120"/>
+              </a:rPr>
+              <a:t>UNDERSTAND NOW</a:t>
+            </a:r>
+            <a:pPr indent="0" marL="0">
+              <a:buNone/>
+            </a:pPr>
+            <a:r>
+              <a:rPr lang="en-US" sz="1100" dirty="0">
+                <a:solidFill>
+                  <a:srgbClr val="075985"/>
+                </a:solidFill>
+                <a:latin typeface="Calibri" pitchFamily="34" charset="0"/>
+                <a:ea typeface="Calibri" pitchFamily="34" charset="-122"/>
+                <a:cs typeface="Calibri" pitchFamily="34" charset="-120"/>
+              </a:rPr>
+              <a:t> · finite-state machines</a:t>
+            </a:r>
+            <a:endParaRPr lang="en-US" sz="1100" dirty="0"/>
+          </a:p>
+        </p:txBody>
+      </p:sp>
+      <p:sp>
+        <p:nvSpPr>
           <p:cNvPr id="25" name="Slide Number Placeholder 0"/>
           <p:cNvSpPr>
             <a:spLocks noGrp="1"/>
@@ -6900,6 +7468,133 @@
       </p:sp>
       <p:sp>
         <p:nvSpPr>
+          <p:cNvPr id="14" name="Shape 12"/>
+          <p:cNvSpPr/>
+          <p:nvPr/>
+        </p:nvSpPr>
+        <p:spPr>
+          <a:xfrm>
+            <a:off x="8287715" y="91440"/>
+            <a:ext cx="3355340" cy="274320"/>
+          </a:xfrm>
+          <a:prstGeom prst="rect">
+            <a:avLst/>
+          </a:prstGeom>
+          <a:solidFill>
+            <a:srgbClr val="E0F2FE"/>
+          </a:solidFill>
+          <a:ln w="12700">
+            <a:solidFill>
+              <a:srgbClr val="0369A1"/>
+            </a:solidFill>
+            <a:prstDash val="solid"/>
+          </a:ln>
+        </p:spPr>
+      </p:sp>
+      <p:sp>
+        <p:nvSpPr>
+          <p:cNvPr id="15" name="Shape 13"/>
+          <p:cNvSpPr/>
+          <p:nvPr/>
+        </p:nvSpPr>
+        <p:spPr>
+          <a:xfrm>
+            <a:off x="8287715" y="91440"/>
+            <a:ext cx="73152" cy="274320"/>
+          </a:xfrm>
+          <a:prstGeom prst="rect">
+            <a:avLst/>
+          </a:prstGeom>
+          <a:solidFill>
+            <a:srgbClr val="0369A1"/>
+          </a:solidFill>
+          <a:ln w="12700">
+            <a:solidFill>
+              <a:srgbClr val="0369A1"/>
+            </a:solidFill>
+            <a:prstDash val="solid"/>
+          </a:ln>
+        </p:spPr>
+      </p:sp>
+      <p:pic>
+        <p:nvPicPr>
+          <p:cNvPr id="16" name="Image 0" descr="preencoded.png">    </p:cNvPr>
+          <p:cNvPicPr>
+            <a:picLocks noChangeAspect="1"/>
+          </p:cNvPicPr>
+          <p:nvPr/>
+        </p:nvPicPr>
+        <p:blipFill>
+          <a:blip r:embed="rId1"/>
+          <a:stretch>
+            <a:fillRect/>
+          </a:stretch>
+        </p:blipFill>
+        <p:spPr>
+          <a:xfrm>
+            <a:off x="8415731" y="128016"/>
+            <a:ext cx="201168" cy="201168"/>
+          </a:xfrm>
+          <a:prstGeom prst="rect">
+            <a:avLst/>
+          </a:prstGeom>
+        </p:spPr>
+      </p:pic>
+      <p:sp>
+        <p:nvSpPr>
+          <p:cNvPr id="17" name="Text 14"/>
+          <p:cNvSpPr txBox="1"/>
+          <p:nvPr/>
+        </p:nvSpPr>
+        <p:spPr>
+          <a:xfrm>
+            <a:off x="8671763" y="91440"/>
+            <a:ext cx="2934716" cy="274320"/>
+          </a:xfrm>
+          <a:prstGeom prst="rect">
+            <a:avLst/>
+          </a:prstGeom>
+          <a:noFill/>
+          <a:ln/>
+        </p:spPr>
+        <p:txBody>
+          <a:bodyPr wrap="square" lIns="0" tIns="0" rIns="0" bIns="0" rtlCol="0" anchor="ctr"/>
+          <a:lstStyle/>
+          <a:p>
+            <a:pPr indent="0" marL="0">
+              <a:buNone/>
+            </a:pPr>
+            <a:r>
+              <a:rPr lang="en-US" sz="1100" b="1" dirty="0">
+                <a:solidFill>
+                  <a:srgbClr val="075985"/>
+                </a:solidFill>
+                <a:latin typeface="Calibri" pitchFamily="34" charset="0"/>
+                <a:ea typeface="Calibri" pitchFamily="34" charset="-122"/>
+                <a:cs typeface="Calibri" pitchFamily="34" charset="-120"/>
+              </a:rPr>
+              <a:t>UNDERSTAND NOW</a:t>
+            </a:r>
+            <a:pPr indent="0" marL="0">
+              <a:buNone/>
+            </a:pPr>
+            <a:r>
+              <a:rPr lang="en-US" sz="1100" dirty="0">
+                <a:solidFill>
+                  <a:srgbClr val="075985"/>
+                </a:solidFill>
+                <a:latin typeface="Calibri" pitchFamily="34" charset="0"/>
+                <a:ea typeface="Calibri" pitchFamily="34" charset="-122"/>
+                <a:cs typeface="Calibri" pitchFamily="34" charset="-120"/>
+              </a:rPr>
+              <a:t> · finite-state machines</a:t>
+            </a:r>
+            <a:endParaRPr lang="en-US" sz="1100" dirty="0"/>
+          </a:p>
+        </p:txBody>
+      </p:sp>
+      <p:sp>
+        <p:nvSpPr>
           <p:cNvPr id="25" name="Slide Number Placeholder 0"/>
           <p:cNvSpPr>
             <a:spLocks noGrp="1"/>
@@ -9414,6 +10109,133 @@
       </p:sp>
       <p:sp>
         <p:nvSpPr>
+          <p:cNvPr id="17" name="Shape 15"/>
+          <p:cNvSpPr/>
+          <p:nvPr/>
+        </p:nvSpPr>
+        <p:spPr>
+          <a:xfrm>
+            <a:off x="8616010" y="91440"/>
+            <a:ext cx="3027045" cy="274320"/>
+          </a:xfrm>
+          <a:prstGeom prst="rect">
+            <a:avLst/>
+          </a:prstGeom>
+          <a:solidFill>
+            <a:srgbClr val="E0F2FE"/>
+          </a:solidFill>
+          <a:ln w="12700">
+            <a:solidFill>
+              <a:srgbClr val="0369A1"/>
+            </a:solidFill>
+            <a:prstDash val="solid"/>
+          </a:ln>
+        </p:spPr>
+      </p:sp>
+      <p:sp>
+        <p:nvSpPr>
+          <p:cNvPr id="18" name="Shape 16"/>
+          <p:cNvSpPr/>
+          <p:nvPr/>
+        </p:nvSpPr>
+        <p:spPr>
+          <a:xfrm>
+            <a:off x="8616010" y="91440"/>
+            <a:ext cx="73152" cy="274320"/>
+          </a:xfrm>
+          <a:prstGeom prst="rect">
+            <a:avLst/>
+          </a:prstGeom>
+          <a:solidFill>
+            <a:srgbClr val="0369A1"/>
+          </a:solidFill>
+          <a:ln w="12700">
+            <a:solidFill>
+              <a:srgbClr val="0369A1"/>
+            </a:solidFill>
+            <a:prstDash val="solid"/>
+          </a:ln>
+        </p:spPr>
+      </p:sp>
+      <p:pic>
+        <p:nvPicPr>
+          <p:cNvPr id="19" name="Image 0" descr="preencoded.png">    </p:cNvPr>
+          <p:cNvPicPr>
+            <a:picLocks noChangeAspect="1"/>
+          </p:cNvPicPr>
+          <p:nvPr/>
+        </p:nvPicPr>
+        <p:blipFill>
+          <a:blip r:embed="rId1"/>
+          <a:stretch>
+            <a:fillRect/>
+          </a:stretch>
+        </p:blipFill>
+        <p:spPr>
+          <a:xfrm>
+            <a:off x="8744026" y="128016"/>
+            <a:ext cx="201168" cy="201168"/>
+          </a:xfrm>
+          <a:prstGeom prst="rect">
+            <a:avLst/>
+          </a:prstGeom>
+        </p:spPr>
+      </p:pic>
+      <p:sp>
+        <p:nvSpPr>
+          <p:cNvPr id="20" name="Text 17"/>
+          <p:cNvSpPr txBox="1"/>
+          <p:nvPr/>
+        </p:nvSpPr>
+        <p:spPr>
+          <a:xfrm>
+            <a:off x="9000058" y="91440"/>
+            <a:ext cx="2606421" cy="274320"/>
+          </a:xfrm>
+          <a:prstGeom prst="rect">
+            <a:avLst/>
+          </a:prstGeom>
+          <a:noFill/>
+          <a:ln/>
+        </p:spPr>
+        <p:txBody>
+          <a:bodyPr wrap="square" lIns="0" tIns="0" rIns="0" bIns="0" rtlCol="0" anchor="ctr"/>
+          <a:lstStyle/>
+          <a:p>
+            <a:pPr indent="0" marL="0">
+              <a:buNone/>
+            </a:pPr>
+            <a:r>
+              <a:rPr lang="en-US" sz="1100" b="1" dirty="0">
+                <a:solidFill>
+                  <a:srgbClr val="075985"/>
+                </a:solidFill>
+                <a:latin typeface="Calibri" pitchFamily="34" charset="0"/>
+                <a:ea typeface="Calibri" pitchFamily="34" charset="-122"/>
+                <a:cs typeface="Calibri" pitchFamily="34" charset="-120"/>
+              </a:rPr>
+              <a:t>UNDERSTAND NOW</a:t>
+            </a:r>
+            <a:pPr indent="0" marL="0">
+              <a:buNone/>
+            </a:pPr>
+            <a:r>
+              <a:rPr lang="en-US" sz="1100" dirty="0">
+                <a:solidFill>
+                  <a:srgbClr val="075985"/>
+                </a:solidFill>
+                <a:latin typeface="Calibri" pitchFamily="34" charset="0"/>
+                <a:ea typeface="Calibri" pitchFamily="34" charset="-122"/>
+                <a:cs typeface="Calibri" pitchFamily="34" charset="-120"/>
+              </a:rPr>
+              <a:t> · arrays in memory</a:t>
+            </a:r>
+            <a:endParaRPr lang="en-US" sz="1100" dirty="0"/>
+          </a:p>
+        </p:txBody>
+      </p:sp>
+      <p:sp>
+        <p:nvSpPr>
           <p:cNvPr id="25" name="Slide Number Placeholder 0"/>
           <p:cNvSpPr>
             <a:spLocks noGrp="1"/>
@@ -10287,6 +11109,133 @@
       </p:sp>
       <p:sp>
         <p:nvSpPr>
+          <p:cNvPr id="14" name="Shape 12"/>
+          <p:cNvSpPr/>
+          <p:nvPr/>
+        </p:nvSpPr>
+        <p:spPr>
+          <a:xfrm>
+            <a:off x="8616010" y="91440"/>
+            <a:ext cx="3027045" cy="274320"/>
+          </a:xfrm>
+          <a:prstGeom prst="rect">
+            <a:avLst/>
+          </a:prstGeom>
+          <a:solidFill>
+            <a:srgbClr val="E0F2FE"/>
+          </a:solidFill>
+          <a:ln w="12700">
+            <a:solidFill>
+              <a:srgbClr val="0369A1"/>
+            </a:solidFill>
+            <a:prstDash val="solid"/>
+          </a:ln>
+        </p:spPr>
+      </p:sp>
+      <p:sp>
+        <p:nvSpPr>
+          <p:cNvPr id="15" name="Shape 13"/>
+          <p:cNvSpPr/>
+          <p:nvPr/>
+        </p:nvSpPr>
+        <p:spPr>
+          <a:xfrm>
+            <a:off x="8616010" y="91440"/>
+            <a:ext cx="73152" cy="274320"/>
+          </a:xfrm>
+          <a:prstGeom prst="rect">
+            <a:avLst/>
+          </a:prstGeom>
+          <a:solidFill>
+            <a:srgbClr val="0369A1"/>
+          </a:solidFill>
+          <a:ln w="12700">
+            <a:solidFill>
+              <a:srgbClr val="0369A1"/>
+            </a:solidFill>
+            <a:prstDash val="solid"/>
+          </a:ln>
+        </p:spPr>
+      </p:sp>
+      <p:pic>
+        <p:nvPicPr>
+          <p:cNvPr id="16" name="Image 0" descr="preencoded.png">    </p:cNvPr>
+          <p:cNvPicPr>
+            <a:picLocks noChangeAspect="1"/>
+          </p:cNvPicPr>
+          <p:nvPr/>
+        </p:nvPicPr>
+        <p:blipFill>
+          <a:blip r:embed="rId1"/>
+          <a:stretch>
+            <a:fillRect/>
+          </a:stretch>
+        </p:blipFill>
+        <p:spPr>
+          <a:xfrm>
+            <a:off x="8744026" y="128016"/>
+            <a:ext cx="201168" cy="201168"/>
+          </a:xfrm>
+          <a:prstGeom prst="rect">
+            <a:avLst/>
+          </a:prstGeom>
+        </p:spPr>
+      </p:pic>
+      <p:sp>
+        <p:nvSpPr>
+          <p:cNvPr id="17" name="Text 14"/>
+          <p:cNvSpPr txBox="1"/>
+          <p:nvPr/>
+        </p:nvSpPr>
+        <p:spPr>
+          <a:xfrm>
+            <a:off x="9000058" y="91440"/>
+            <a:ext cx="2606421" cy="274320"/>
+          </a:xfrm>
+          <a:prstGeom prst="rect">
+            <a:avLst/>
+          </a:prstGeom>
+          <a:noFill/>
+          <a:ln/>
+        </p:spPr>
+        <p:txBody>
+          <a:bodyPr wrap="square" lIns="0" tIns="0" rIns="0" bIns="0" rtlCol="0" anchor="ctr"/>
+          <a:lstStyle/>
+          <a:p>
+            <a:pPr indent="0" marL="0">
+              <a:buNone/>
+            </a:pPr>
+            <a:r>
+              <a:rPr lang="en-US" sz="1100" b="1" dirty="0">
+                <a:solidFill>
+                  <a:srgbClr val="075985"/>
+                </a:solidFill>
+                <a:latin typeface="Calibri" pitchFamily="34" charset="0"/>
+                <a:ea typeface="Calibri" pitchFamily="34" charset="-122"/>
+                <a:cs typeface="Calibri" pitchFamily="34" charset="-120"/>
+              </a:rPr>
+              <a:t>UNDERSTAND NOW</a:t>
+            </a:r>
+            <a:pPr indent="0" marL="0">
+              <a:buNone/>
+            </a:pPr>
+            <a:r>
+              <a:rPr lang="en-US" sz="1100" dirty="0">
+                <a:solidFill>
+                  <a:srgbClr val="075985"/>
+                </a:solidFill>
+                <a:latin typeface="Calibri" pitchFamily="34" charset="0"/>
+                <a:ea typeface="Calibri" pitchFamily="34" charset="-122"/>
+                <a:cs typeface="Calibri" pitchFamily="34" charset="-120"/>
+              </a:rPr>
+              <a:t> · arrays in memory</a:t>
+            </a:r>
+            <a:endParaRPr lang="en-US" sz="1100" dirty="0"/>
+          </a:p>
+        </p:txBody>
+      </p:sp>
+      <p:sp>
+        <p:nvSpPr>
           <p:cNvPr id="25" name="Slide Number Placeholder 0"/>
           <p:cNvSpPr>
             <a:spLocks noGrp="1"/>
@@ -11420,6 +12369,133 @@
       </p:sp>
       <p:sp>
         <p:nvSpPr>
+          <p:cNvPr id="17" name="Shape 15"/>
+          <p:cNvSpPr/>
+          <p:nvPr/>
+        </p:nvSpPr>
+        <p:spPr>
+          <a:xfrm>
+            <a:off x="8616010" y="91440"/>
+            <a:ext cx="3027045" cy="274320"/>
+          </a:xfrm>
+          <a:prstGeom prst="rect">
+            <a:avLst/>
+          </a:prstGeom>
+          <a:solidFill>
+            <a:srgbClr val="E0F2FE"/>
+          </a:solidFill>
+          <a:ln w="12700">
+            <a:solidFill>
+              <a:srgbClr val="0369A1"/>
+            </a:solidFill>
+            <a:prstDash val="solid"/>
+          </a:ln>
+        </p:spPr>
+      </p:sp>
+      <p:sp>
+        <p:nvSpPr>
+          <p:cNvPr id="18" name="Shape 16"/>
+          <p:cNvSpPr/>
+          <p:nvPr/>
+        </p:nvSpPr>
+        <p:spPr>
+          <a:xfrm>
+            <a:off x="8616010" y="91440"/>
+            <a:ext cx="73152" cy="274320"/>
+          </a:xfrm>
+          <a:prstGeom prst="rect">
+            <a:avLst/>
+          </a:prstGeom>
+          <a:solidFill>
+            <a:srgbClr val="0369A1"/>
+          </a:solidFill>
+          <a:ln w="12700">
+            <a:solidFill>
+              <a:srgbClr val="0369A1"/>
+            </a:solidFill>
+            <a:prstDash val="solid"/>
+          </a:ln>
+        </p:spPr>
+      </p:sp>
+      <p:pic>
+        <p:nvPicPr>
+          <p:cNvPr id="19" name="Image 0" descr="preencoded.png">    </p:cNvPr>
+          <p:cNvPicPr>
+            <a:picLocks noChangeAspect="1"/>
+          </p:cNvPicPr>
+          <p:nvPr/>
+        </p:nvPicPr>
+        <p:blipFill>
+          <a:blip r:embed="rId1"/>
+          <a:stretch>
+            <a:fillRect/>
+          </a:stretch>
+        </p:blipFill>
+        <p:spPr>
+          <a:xfrm>
+            <a:off x="8744026" y="128016"/>
+            <a:ext cx="201168" cy="201168"/>
+          </a:xfrm>
+          <a:prstGeom prst="rect">
+            <a:avLst/>
+          </a:prstGeom>
+        </p:spPr>
+      </p:pic>
+      <p:sp>
+        <p:nvSpPr>
+          <p:cNvPr id="20" name="Text 17"/>
+          <p:cNvSpPr txBox="1"/>
+          <p:nvPr/>
+        </p:nvSpPr>
+        <p:spPr>
+          <a:xfrm>
+            <a:off x="9000058" y="91440"/>
+            <a:ext cx="2606421" cy="274320"/>
+          </a:xfrm>
+          <a:prstGeom prst="rect">
+            <a:avLst/>
+          </a:prstGeom>
+          <a:noFill/>
+          <a:ln/>
+        </p:spPr>
+        <p:txBody>
+          <a:bodyPr wrap="square" lIns="0" tIns="0" rIns="0" bIns="0" rtlCol="0" anchor="ctr"/>
+          <a:lstStyle/>
+          <a:p>
+            <a:pPr indent="0" marL="0">
+              <a:buNone/>
+            </a:pPr>
+            <a:r>
+              <a:rPr lang="en-US" sz="1100" b="1" dirty="0">
+                <a:solidFill>
+                  <a:srgbClr val="075985"/>
+                </a:solidFill>
+                <a:latin typeface="Calibri" pitchFamily="34" charset="0"/>
+                <a:ea typeface="Calibri" pitchFamily="34" charset="-122"/>
+                <a:cs typeface="Calibri" pitchFamily="34" charset="-120"/>
+              </a:rPr>
+              <a:t>UNDERSTAND NOW</a:t>
+            </a:r>
+            <a:pPr indent="0" marL="0">
+              <a:buNone/>
+            </a:pPr>
+            <a:r>
+              <a:rPr lang="en-US" sz="1100" dirty="0">
+                <a:solidFill>
+                  <a:srgbClr val="075985"/>
+                </a:solidFill>
+                <a:latin typeface="Calibri" pitchFamily="34" charset="0"/>
+                <a:ea typeface="Calibri" pitchFamily="34" charset="-122"/>
+                <a:cs typeface="Calibri" pitchFamily="34" charset="-120"/>
+              </a:rPr>
+              <a:t> · arrays in memory</a:t>
+            </a:r>
+            <a:endParaRPr lang="en-US" sz="1100" dirty="0"/>
+          </a:p>
+        </p:txBody>
+      </p:sp>
+      <p:sp>
+        <p:nvSpPr>
           <p:cNvPr id="25" name="Slide Number Placeholder 0"/>
           <p:cNvSpPr>
             <a:spLocks noGrp="1"/>
@@ -12307,6 +13383,172 @@
       </p:sp>
       <p:sp>
         <p:nvSpPr>
+          <p:cNvPr id="14" name="Shape 12"/>
+          <p:cNvSpPr/>
+          <p:nvPr/>
+        </p:nvSpPr>
+        <p:spPr>
+          <a:xfrm>
+            <a:off x="7865821" y="91440"/>
+            <a:ext cx="3777234" cy="274320"/>
+          </a:xfrm>
+          <a:prstGeom prst="rect">
+            <a:avLst/>
+          </a:prstGeom>
+          <a:solidFill>
+            <a:srgbClr val="FEF3C7"/>
+          </a:solidFill>
+          <a:ln w="12700">
+            <a:solidFill>
+              <a:srgbClr val="B45309"/>
+            </a:solidFill>
+            <a:prstDash val="solid"/>
+          </a:ln>
+        </p:spPr>
+      </p:sp>
+      <p:sp>
+        <p:nvSpPr>
+          <p:cNvPr id="15" name="Shape 13"/>
+          <p:cNvSpPr/>
+          <p:nvPr/>
+        </p:nvSpPr>
+        <p:spPr>
+          <a:xfrm>
+            <a:off x="7865821" y="91440"/>
+            <a:ext cx="27432" cy="274320"/>
+          </a:xfrm>
+          <a:prstGeom prst="rect">
+            <a:avLst/>
+          </a:prstGeom>
+          <a:solidFill>
+            <a:srgbClr val="B45309"/>
+          </a:solidFill>
+          <a:ln w="12700">
+            <a:solidFill>
+              <a:srgbClr val="B45309"/>
+            </a:solidFill>
+            <a:prstDash val="solid"/>
+          </a:ln>
+        </p:spPr>
+      </p:sp>
+      <p:sp>
+        <p:nvSpPr>
+          <p:cNvPr id="16" name="Shape 14"/>
+          <p:cNvSpPr/>
+          <p:nvPr/>
+        </p:nvSpPr>
+        <p:spPr>
+          <a:xfrm>
+            <a:off x="7920685" y="91440"/>
+            <a:ext cx="27432" cy="274320"/>
+          </a:xfrm>
+          <a:prstGeom prst="rect">
+            <a:avLst/>
+          </a:prstGeom>
+          <a:solidFill>
+            <a:srgbClr val="B45309"/>
+          </a:solidFill>
+          <a:ln w="12700">
+            <a:solidFill>
+              <a:srgbClr val="B45309"/>
+            </a:solidFill>
+            <a:prstDash val="solid"/>
+          </a:ln>
+        </p:spPr>
+      </p:sp>
+      <p:pic>
+        <p:nvPicPr>
+          <p:cNvPr id="17" name="Image 0" descr="preencoded.png">    </p:cNvPr>
+          <p:cNvPicPr>
+            <a:picLocks noChangeAspect="1"/>
+          </p:cNvPicPr>
+          <p:nvPr/>
+        </p:nvPicPr>
+        <p:blipFill>
+          <a:blip r:embed="rId1"/>
+          <a:stretch>
+            <a:fillRect/>
+          </a:stretch>
+        </p:blipFill>
+        <p:spPr>
+          <a:xfrm>
+            <a:off x="7993837" y="128016"/>
+            <a:ext cx="201168" cy="201168"/>
+          </a:xfrm>
+          <a:prstGeom prst="rect">
+            <a:avLst/>
+          </a:prstGeom>
+        </p:spPr>
+      </p:pic>
+      <p:sp>
+        <p:nvSpPr>
+          <p:cNvPr id="18" name="Text 15"/>
+          <p:cNvSpPr txBox="1"/>
+          <p:nvPr/>
+        </p:nvSpPr>
+        <p:spPr>
+          <a:xfrm>
+            <a:off x="8249869" y="91440"/>
+            <a:ext cx="3356610" cy="274320"/>
+          </a:xfrm>
+          <a:prstGeom prst="rect">
+            <a:avLst/>
+          </a:prstGeom>
+          <a:noFill/>
+          <a:ln/>
+        </p:spPr>
+        <p:txBody>
+          <a:bodyPr wrap="square" lIns="0" tIns="0" rIns="0" bIns="0" rtlCol="0" anchor="ctr"/>
+          <a:lstStyle/>
+          <a:p>
+            <a:pPr indent="0" marL="0">
+              <a:buNone/>
+            </a:pPr>
+            <a:r>
+              <a:rPr lang="en-US" sz="1100" b="1" dirty="0">
+                <a:solidFill>
+                  <a:srgbClr val="92400E"/>
+                </a:solidFill>
+                <a:latin typeface="Calibri" pitchFamily="34" charset="0"/>
+                <a:ea typeface="Calibri" pitchFamily="34" charset="-122"/>
+                <a:cs typeface="Calibri" pitchFamily="34" charset="-120"/>
+              </a:rPr>
+              <a:t>USE NOW</a:t>
+            </a:r>
+            <a:pPr indent="0" marL="0">
+              <a:buNone/>
+            </a:pPr>
+            <a:r>
+              <a:rPr lang="en-US" sz="1100" dirty="0">
+                <a:solidFill>
+                  <a:srgbClr val="92400E"/>
+                </a:solidFill>
+                <a:latin typeface="Calibri" pitchFamily="34" charset="0"/>
+                <a:ea typeface="Calibri" pitchFamily="34" charset="-122"/>
+                <a:cs typeface="Calibri" pitchFamily="34" charset="-120"/>
+              </a:rPr>
+              <a:t> · the calling convention</a:t>
+            </a:r>
+            <a:pPr indent="0" marL="0">
+              <a:buNone/>
+            </a:pPr>
+            <a:r>
+              <a:rPr lang="en-US" sz="1100" b="1" dirty="0">
+                <a:solidFill>
+                  <a:srgbClr val="92400E"/>
+                </a:solidFill>
+                <a:latin typeface="Calibri" pitchFamily="34" charset="0"/>
+                <a:ea typeface="Calibri" pitchFamily="34" charset="-122"/>
+                <a:cs typeface="Calibri" pitchFamily="34" charset="-120"/>
+              </a:rPr>
+              <a:t> → Lecture 18</a:t>
+            </a:r>
+            <a:endParaRPr lang="en-US" sz="1100" dirty="0"/>
+          </a:p>
+        </p:txBody>
+      </p:sp>
+      <p:sp>
+        <p:nvSpPr>
           <p:cNvPr id="25" name="Slide Number Placeholder 0"/>
           <p:cNvSpPr>
             <a:spLocks noGrp="1"/>
@@ -14905,6 +16147,133 @@
       </p:sp>
       <p:sp>
         <p:nvSpPr>
+          <p:cNvPr id="14" name="Shape 12"/>
+          <p:cNvSpPr/>
+          <p:nvPr/>
+        </p:nvSpPr>
+        <p:spPr>
+          <a:xfrm>
+            <a:off x="8944305" y="91440"/>
+            <a:ext cx="2698750" cy="274320"/>
+          </a:xfrm>
+          <a:prstGeom prst="rect">
+            <a:avLst/>
+          </a:prstGeom>
+          <a:solidFill>
+            <a:srgbClr val="E0F2FE"/>
+          </a:solidFill>
+          <a:ln w="12700">
+            <a:solidFill>
+              <a:srgbClr val="0369A1"/>
+            </a:solidFill>
+            <a:prstDash val="solid"/>
+          </a:ln>
+        </p:spPr>
+      </p:sp>
+      <p:sp>
+        <p:nvSpPr>
+          <p:cNvPr id="15" name="Shape 13"/>
+          <p:cNvSpPr/>
+          <p:nvPr/>
+        </p:nvSpPr>
+        <p:spPr>
+          <a:xfrm>
+            <a:off x="8944305" y="91440"/>
+            <a:ext cx="73152" cy="274320"/>
+          </a:xfrm>
+          <a:prstGeom prst="rect">
+            <a:avLst/>
+          </a:prstGeom>
+          <a:solidFill>
+            <a:srgbClr val="0369A1"/>
+          </a:solidFill>
+          <a:ln w="12700">
+            <a:solidFill>
+              <a:srgbClr val="0369A1"/>
+            </a:solidFill>
+            <a:prstDash val="solid"/>
+          </a:ln>
+        </p:spPr>
+      </p:sp>
+      <p:pic>
+        <p:nvPicPr>
+          <p:cNvPr id="16" name="Image 0" descr="preencoded.png">    </p:cNvPr>
+          <p:cNvPicPr>
+            <a:picLocks noChangeAspect="1"/>
+          </p:cNvPicPr>
+          <p:nvPr/>
+        </p:nvPicPr>
+        <p:blipFill>
+          <a:blip r:embed="rId1"/>
+          <a:stretch>
+            <a:fillRect/>
+          </a:stretch>
+        </p:blipFill>
+        <p:spPr>
+          <a:xfrm>
+            <a:off x="9072321" y="128016"/>
+            <a:ext cx="201168" cy="201168"/>
+          </a:xfrm>
+          <a:prstGeom prst="rect">
+            <a:avLst/>
+          </a:prstGeom>
+        </p:spPr>
+      </p:pic>
+      <p:sp>
+        <p:nvSpPr>
+          <p:cNvPr id="17" name="Text 14"/>
+          <p:cNvSpPr txBox="1"/>
+          <p:nvPr/>
+        </p:nvSpPr>
+        <p:spPr>
+          <a:xfrm>
+            <a:off x="9328353" y="91440"/>
+            <a:ext cx="2278126" cy="274320"/>
+          </a:xfrm>
+          <a:prstGeom prst="rect">
+            <a:avLst/>
+          </a:prstGeom>
+          <a:noFill/>
+          <a:ln/>
+        </p:spPr>
+        <p:txBody>
+          <a:bodyPr wrap="square" lIns="0" tIns="0" rIns="0" bIns="0" rtlCol="0" anchor="ctr"/>
+          <a:lstStyle/>
+          <a:p>
+            <a:pPr indent="0" marL="0">
+              <a:buNone/>
+            </a:pPr>
+            <a:r>
+              <a:rPr lang="en-US" sz="1100" b="1" dirty="0">
+                <a:solidFill>
+                  <a:srgbClr val="075985"/>
+                </a:solidFill>
+                <a:latin typeface="Calibri" pitchFamily="34" charset="0"/>
+                <a:ea typeface="Calibri" pitchFamily="34" charset="-122"/>
+                <a:cs typeface="Calibri" pitchFamily="34" charset="-120"/>
+              </a:rPr>
+              <a:t>UNDERSTAND NOW</a:t>
+            </a:r>
+            <a:pPr indent="0" marL="0">
+              <a:buNone/>
+            </a:pPr>
+            <a:r>
+              <a:rPr lang="en-US" sz="1100" dirty="0">
+                <a:solidFill>
+                  <a:srgbClr val="075985"/>
+                </a:solidFill>
+                <a:latin typeface="Calibri" pitchFamily="34" charset="0"/>
+                <a:ea typeface="Calibri" pitchFamily="34" charset="-122"/>
+                <a:cs typeface="Calibri" pitchFamily="34" charset="-120"/>
+              </a:rPr>
+              <a:t> · fixed point</a:t>
+            </a:r>
+            <a:endParaRPr lang="en-US" sz="1100" dirty="0"/>
+          </a:p>
+        </p:txBody>
+      </p:sp>
+      <p:sp>
+        <p:nvSpPr>
           <p:cNvPr id="25" name="Slide Number Placeholder 0"/>
           <p:cNvSpPr>
             <a:spLocks noGrp="1"/>
@@ -15557,6 +16926,133 @@
       </p:sp>
       <p:sp>
         <p:nvSpPr>
+          <p:cNvPr id="11" name="Shape 9"/>
+          <p:cNvSpPr/>
+          <p:nvPr/>
+        </p:nvSpPr>
+        <p:spPr>
+          <a:xfrm>
+            <a:off x="8944305" y="91440"/>
+            <a:ext cx="2698750" cy="274320"/>
+          </a:xfrm>
+          <a:prstGeom prst="rect">
+            <a:avLst/>
+          </a:prstGeom>
+          <a:solidFill>
+            <a:srgbClr val="E0F2FE"/>
+          </a:solidFill>
+          <a:ln w="12700">
+            <a:solidFill>
+              <a:srgbClr val="0369A1"/>
+            </a:solidFill>
+            <a:prstDash val="solid"/>
+          </a:ln>
+        </p:spPr>
+      </p:sp>
+      <p:sp>
+        <p:nvSpPr>
+          <p:cNvPr id="12" name="Shape 10"/>
+          <p:cNvSpPr/>
+          <p:nvPr/>
+        </p:nvSpPr>
+        <p:spPr>
+          <a:xfrm>
+            <a:off x="8944305" y="91440"/>
+            <a:ext cx="73152" cy="274320"/>
+          </a:xfrm>
+          <a:prstGeom prst="rect">
+            <a:avLst/>
+          </a:prstGeom>
+          <a:solidFill>
+            <a:srgbClr val="0369A1"/>
+          </a:solidFill>
+          <a:ln w="12700">
+            <a:solidFill>
+              <a:srgbClr val="0369A1"/>
+            </a:solidFill>
+            <a:prstDash val="solid"/>
+          </a:ln>
+        </p:spPr>
+      </p:sp>
+      <p:pic>
+        <p:nvPicPr>
+          <p:cNvPr id="13" name="Image 0" descr="preencoded.png">    </p:cNvPr>
+          <p:cNvPicPr>
+            <a:picLocks noChangeAspect="1"/>
+          </p:cNvPicPr>
+          <p:nvPr/>
+        </p:nvPicPr>
+        <p:blipFill>
+          <a:blip r:embed="rId1"/>
+          <a:stretch>
+            <a:fillRect/>
+          </a:stretch>
+        </p:blipFill>
+        <p:spPr>
+          <a:xfrm>
+            <a:off x="9072321" y="128016"/>
+            <a:ext cx="201168" cy="201168"/>
+          </a:xfrm>
+          <a:prstGeom prst="rect">
+            <a:avLst/>
+          </a:prstGeom>
+        </p:spPr>
+      </p:pic>
+      <p:sp>
+        <p:nvSpPr>
+          <p:cNvPr id="14" name="Text 11"/>
+          <p:cNvSpPr txBox="1"/>
+          <p:nvPr/>
+        </p:nvSpPr>
+        <p:spPr>
+          <a:xfrm>
+            <a:off x="9328353" y="91440"/>
+            <a:ext cx="2278126" cy="274320"/>
+          </a:xfrm>
+          <a:prstGeom prst="rect">
+            <a:avLst/>
+          </a:prstGeom>
+          <a:noFill/>
+          <a:ln/>
+        </p:spPr>
+        <p:txBody>
+          <a:bodyPr wrap="square" lIns="0" tIns="0" rIns="0" bIns="0" rtlCol="0" anchor="ctr"/>
+          <a:lstStyle/>
+          <a:p>
+            <a:pPr indent="0" marL="0">
+              <a:buNone/>
+            </a:pPr>
+            <a:r>
+              <a:rPr lang="en-US" sz="1100" b="1" dirty="0">
+                <a:solidFill>
+                  <a:srgbClr val="075985"/>
+                </a:solidFill>
+                <a:latin typeface="Calibri" pitchFamily="34" charset="0"/>
+                <a:ea typeface="Calibri" pitchFamily="34" charset="-122"/>
+                <a:cs typeface="Calibri" pitchFamily="34" charset="-120"/>
+              </a:rPr>
+              <a:t>UNDERSTAND NOW</a:t>
+            </a:r>
+            <a:pPr indent="0" marL="0">
+              <a:buNone/>
+            </a:pPr>
+            <a:r>
+              <a:rPr lang="en-US" sz="1100" dirty="0">
+                <a:solidFill>
+                  <a:srgbClr val="075985"/>
+                </a:solidFill>
+                <a:latin typeface="Calibri" pitchFamily="34" charset="0"/>
+                <a:ea typeface="Calibri" pitchFamily="34" charset="-122"/>
+                <a:cs typeface="Calibri" pitchFamily="34" charset="-120"/>
+              </a:rPr>
+              <a:t> · fixed point</a:t>
+            </a:r>
+            <a:endParaRPr lang="en-US" sz="1100" dirty="0"/>
+          </a:p>
+        </p:txBody>
+      </p:sp>
+      <p:sp>
+        <p:nvSpPr>
           <p:cNvPr id="25" name="Slide Number Placeholder 0"/>
           <p:cNvSpPr>
             <a:spLocks noGrp="1"/>
@@ -16559,6 +18055,172 @@
       </p:sp>
       <p:sp>
         <p:nvSpPr>
+          <p:cNvPr id="17" name="Shape 15"/>
+          <p:cNvSpPr/>
+          <p:nvPr/>
+        </p:nvSpPr>
+        <p:spPr>
+          <a:xfrm>
+            <a:off x="7865821" y="91440"/>
+            <a:ext cx="3777234" cy="274320"/>
+          </a:xfrm>
+          <a:prstGeom prst="rect">
+            <a:avLst/>
+          </a:prstGeom>
+          <a:solidFill>
+            <a:srgbClr val="FEF3C7"/>
+          </a:solidFill>
+          <a:ln w="12700">
+            <a:solidFill>
+              <a:srgbClr val="B45309"/>
+            </a:solidFill>
+            <a:prstDash val="solid"/>
+          </a:ln>
+        </p:spPr>
+      </p:sp>
+      <p:sp>
+        <p:nvSpPr>
+          <p:cNvPr id="18" name="Shape 16"/>
+          <p:cNvSpPr/>
+          <p:nvPr/>
+        </p:nvSpPr>
+        <p:spPr>
+          <a:xfrm>
+            <a:off x="7865821" y="91440"/>
+            <a:ext cx="27432" cy="274320"/>
+          </a:xfrm>
+          <a:prstGeom prst="rect">
+            <a:avLst/>
+          </a:prstGeom>
+          <a:solidFill>
+            <a:srgbClr val="B45309"/>
+          </a:solidFill>
+          <a:ln w="12700">
+            <a:solidFill>
+              <a:srgbClr val="B45309"/>
+            </a:solidFill>
+            <a:prstDash val="solid"/>
+          </a:ln>
+        </p:spPr>
+      </p:sp>
+      <p:sp>
+        <p:nvSpPr>
+          <p:cNvPr id="19" name="Shape 17"/>
+          <p:cNvSpPr/>
+          <p:nvPr/>
+        </p:nvSpPr>
+        <p:spPr>
+          <a:xfrm>
+            <a:off x="7920685" y="91440"/>
+            <a:ext cx="27432" cy="274320"/>
+          </a:xfrm>
+          <a:prstGeom prst="rect">
+            <a:avLst/>
+          </a:prstGeom>
+          <a:solidFill>
+            <a:srgbClr val="B45309"/>
+          </a:solidFill>
+          <a:ln w="12700">
+            <a:solidFill>
+              <a:srgbClr val="B45309"/>
+            </a:solidFill>
+            <a:prstDash val="solid"/>
+          </a:ln>
+        </p:spPr>
+      </p:sp>
+      <p:pic>
+        <p:nvPicPr>
+          <p:cNvPr id="20" name="Image 0" descr="preencoded.png">    </p:cNvPr>
+          <p:cNvPicPr>
+            <a:picLocks noChangeAspect="1"/>
+          </p:cNvPicPr>
+          <p:nvPr/>
+        </p:nvPicPr>
+        <p:blipFill>
+          <a:blip r:embed="rId1"/>
+          <a:stretch>
+            <a:fillRect/>
+          </a:stretch>
+        </p:blipFill>
+        <p:spPr>
+          <a:xfrm>
+            <a:off x="7993837" y="128016"/>
+            <a:ext cx="201168" cy="201168"/>
+          </a:xfrm>
+          <a:prstGeom prst="rect">
+            <a:avLst/>
+          </a:prstGeom>
+        </p:spPr>
+      </p:pic>
+      <p:sp>
+        <p:nvSpPr>
+          <p:cNvPr id="21" name="Text 18"/>
+          <p:cNvSpPr txBox="1"/>
+          <p:nvPr/>
+        </p:nvSpPr>
+        <p:spPr>
+          <a:xfrm>
+            <a:off x="8249869" y="91440"/>
+            <a:ext cx="3356610" cy="274320"/>
+          </a:xfrm>
+          <a:prstGeom prst="rect">
+            <a:avLst/>
+          </a:prstGeom>
+          <a:noFill/>
+          <a:ln/>
+        </p:spPr>
+        <p:txBody>
+          <a:bodyPr wrap="square" lIns="0" tIns="0" rIns="0" bIns="0" rtlCol="0" anchor="ctr"/>
+          <a:lstStyle/>
+          <a:p>
+            <a:pPr indent="0" marL="0">
+              <a:buNone/>
+            </a:pPr>
+            <a:r>
+              <a:rPr lang="en-US" sz="1100" b="1" dirty="0">
+                <a:solidFill>
+                  <a:srgbClr val="92400E"/>
+                </a:solidFill>
+                <a:latin typeface="Calibri" pitchFamily="34" charset="0"/>
+                <a:ea typeface="Calibri" pitchFamily="34" charset="-122"/>
+                <a:cs typeface="Calibri" pitchFamily="34" charset="-120"/>
+              </a:rPr>
+              <a:t>USE NOW</a:t>
+            </a:r>
+            <a:pPr indent="0" marL="0">
+              <a:buNone/>
+            </a:pPr>
+            <a:r>
+              <a:rPr lang="en-US" sz="1100" dirty="0">
+                <a:solidFill>
+                  <a:srgbClr val="92400E"/>
+                </a:solidFill>
+                <a:latin typeface="Calibri" pitchFamily="34" charset="0"/>
+                <a:ea typeface="Calibri" pitchFamily="34" charset="-122"/>
+                <a:cs typeface="Calibri" pitchFamily="34" charset="-120"/>
+              </a:rPr>
+              <a:t> · the calling convention</a:t>
+            </a:r>
+            <a:pPr indent="0" marL="0">
+              <a:buNone/>
+            </a:pPr>
+            <a:r>
+              <a:rPr lang="en-US" sz="1100" b="1" dirty="0">
+                <a:solidFill>
+                  <a:srgbClr val="92400E"/>
+                </a:solidFill>
+                <a:latin typeface="Calibri" pitchFamily="34" charset="0"/>
+                <a:ea typeface="Calibri" pitchFamily="34" charset="-122"/>
+                <a:cs typeface="Calibri" pitchFamily="34" charset="-120"/>
+              </a:rPr>
+              <a:t> → Lecture 18</a:t>
+            </a:r>
+            <a:endParaRPr lang="en-US" sz="1100" dirty="0"/>
+          </a:p>
+        </p:txBody>
+      </p:sp>
+      <p:sp>
+        <p:nvSpPr>
           <p:cNvPr id="25" name="Slide Number Placeholder 0"/>
           <p:cNvSpPr>
             <a:spLocks noGrp="1"/>
@@ -17573,6 +19235,133 @@
       </p:sp>
       <p:sp>
         <p:nvSpPr>
+          <p:cNvPr id="17" name="Shape 15"/>
+          <p:cNvSpPr/>
+          <p:nvPr/>
+        </p:nvSpPr>
+        <p:spPr>
+          <a:xfrm>
+            <a:off x="8616010" y="91440"/>
+            <a:ext cx="3027045" cy="274320"/>
+          </a:xfrm>
+          <a:prstGeom prst="rect">
+            <a:avLst/>
+          </a:prstGeom>
+          <a:solidFill>
+            <a:srgbClr val="E0F2FE"/>
+          </a:solidFill>
+          <a:ln w="12700">
+            <a:solidFill>
+              <a:srgbClr val="0369A1"/>
+            </a:solidFill>
+            <a:prstDash val="solid"/>
+          </a:ln>
+        </p:spPr>
+      </p:sp>
+      <p:sp>
+        <p:nvSpPr>
+          <p:cNvPr id="18" name="Shape 16"/>
+          <p:cNvSpPr/>
+          <p:nvPr/>
+        </p:nvSpPr>
+        <p:spPr>
+          <a:xfrm>
+            <a:off x="8616010" y="91440"/>
+            <a:ext cx="73152" cy="274320"/>
+          </a:xfrm>
+          <a:prstGeom prst="rect">
+            <a:avLst/>
+          </a:prstGeom>
+          <a:solidFill>
+            <a:srgbClr val="0369A1"/>
+          </a:solidFill>
+          <a:ln w="12700">
+            <a:solidFill>
+              <a:srgbClr val="0369A1"/>
+            </a:solidFill>
+            <a:prstDash val="solid"/>
+          </a:ln>
+        </p:spPr>
+      </p:sp>
+      <p:pic>
+        <p:nvPicPr>
+          <p:cNvPr id="19" name="Image 0" descr="preencoded.png">    </p:cNvPr>
+          <p:cNvPicPr>
+            <a:picLocks noChangeAspect="1"/>
+          </p:cNvPicPr>
+          <p:nvPr/>
+        </p:nvPicPr>
+        <p:blipFill>
+          <a:blip r:embed="rId1"/>
+          <a:stretch>
+            <a:fillRect/>
+          </a:stretch>
+        </p:blipFill>
+        <p:spPr>
+          <a:xfrm>
+            <a:off x="8744026" y="128016"/>
+            <a:ext cx="201168" cy="201168"/>
+          </a:xfrm>
+          <a:prstGeom prst="rect">
+            <a:avLst/>
+          </a:prstGeom>
+        </p:spPr>
+      </p:pic>
+      <p:sp>
+        <p:nvSpPr>
+          <p:cNvPr id="20" name="Text 17"/>
+          <p:cNvSpPr txBox="1"/>
+          <p:nvPr/>
+        </p:nvSpPr>
+        <p:spPr>
+          <a:xfrm>
+            <a:off x="9000058" y="91440"/>
+            <a:ext cx="2606421" cy="274320"/>
+          </a:xfrm>
+          <a:prstGeom prst="rect">
+            <a:avLst/>
+          </a:prstGeom>
+          <a:noFill/>
+          <a:ln/>
+        </p:spPr>
+        <p:txBody>
+          <a:bodyPr wrap="square" lIns="0" tIns="0" rIns="0" bIns="0" rtlCol="0" anchor="ctr"/>
+          <a:lstStyle/>
+          <a:p>
+            <a:pPr indent="0" marL="0">
+              <a:buNone/>
+            </a:pPr>
+            <a:r>
+              <a:rPr lang="en-US" sz="1100" b="1" dirty="0">
+                <a:solidFill>
+                  <a:srgbClr val="075985"/>
+                </a:solidFill>
+                <a:latin typeface="Calibri" pitchFamily="34" charset="0"/>
+                <a:ea typeface="Calibri" pitchFamily="34" charset="-122"/>
+                <a:cs typeface="Calibri" pitchFamily="34" charset="-120"/>
+              </a:rPr>
+              <a:t>UNDERSTAND NOW</a:t>
+            </a:r>
+            <a:pPr indent="0" marL="0">
+              <a:buNone/>
+            </a:pPr>
+            <a:r>
+              <a:rPr lang="en-US" sz="1100" dirty="0">
+                <a:solidFill>
+                  <a:srgbClr val="075985"/>
+                </a:solidFill>
+                <a:latin typeface="Calibri" pitchFamily="34" charset="0"/>
+                <a:ea typeface="Calibri" pitchFamily="34" charset="-122"/>
+                <a:cs typeface="Calibri" pitchFamily="34" charset="-120"/>
+              </a:rPr>
+              <a:t> · arrays in memory</a:t>
+            </a:r>
+            <a:endParaRPr lang="en-US" sz="1100" dirty="0"/>
+          </a:p>
+        </p:txBody>
+      </p:sp>
+      <p:sp>
+        <p:nvSpPr>
           <p:cNvPr id="25" name="Slide Number Placeholder 0"/>
           <p:cNvSpPr>
             <a:spLocks noGrp="1"/>
@@ -18700,6 +20489,133 @@
       </p:sp>
       <p:sp>
         <p:nvSpPr>
+          <p:cNvPr id="17" name="Shape 15"/>
+          <p:cNvSpPr/>
+          <p:nvPr/>
+        </p:nvSpPr>
+        <p:spPr>
+          <a:xfrm>
+            <a:off x="8616010" y="91440"/>
+            <a:ext cx="3027045" cy="274320"/>
+          </a:xfrm>
+          <a:prstGeom prst="rect">
+            <a:avLst/>
+          </a:prstGeom>
+          <a:solidFill>
+            <a:srgbClr val="E0F2FE"/>
+          </a:solidFill>
+          <a:ln w="12700">
+            <a:solidFill>
+              <a:srgbClr val="0369A1"/>
+            </a:solidFill>
+            <a:prstDash val="solid"/>
+          </a:ln>
+        </p:spPr>
+      </p:sp>
+      <p:sp>
+        <p:nvSpPr>
+          <p:cNvPr id="18" name="Shape 16"/>
+          <p:cNvSpPr/>
+          <p:nvPr/>
+        </p:nvSpPr>
+        <p:spPr>
+          <a:xfrm>
+            <a:off x="8616010" y="91440"/>
+            <a:ext cx="73152" cy="274320"/>
+          </a:xfrm>
+          <a:prstGeom prst="rect">
+            <a:avLst/>
+          </a:prstGeom>
+          <a:solidFill>
+            <a:srgbClr val="0369A1"/>
+          </a:solidFill>
+          <a:ln w="12700">
+            <a:solidFill>
+              <a:srgbClr val="0369A1"/>
+            </a:solidFill>
+            <a:prstDash val="solid"/>
+          </a:ln>
+        </p:spPr>
+      </p:sp>
+      <p:pic>
+        <p:nvPicPr>
+          <p:cNvPr id="19" name="Image 0" descr="preencoded.png">    </p:cNvPr>
+          <p:cNvPicPr>
+            <a:picLocks noChangeAspect="1"/>
+          </p:cNvPicPr>
+          <p:nvPr/>
+        </p:nvPicPr>
+        <p:blipFill>
+          <a:blip r:embed="rId1"/>
+          <a:stretch>
+            <a:fillRect/>
+          </a:stretch>
+        </p:blipFill>
+        <p:spPr>
+          <a:xfrm>
+            <a:off x="8744026" y="128016"/>
+            <a:ext cx="201168" cy="201168"/>
+          </a:xfrm>
+          <a:prstGeom prst="rect">
+            <a:avLst/>
+          </a:prstGeom>
+        </p:spPr>
+      </p:pic>
+      <p:sp>
+        <p:nvSpPr>
+          <p:cNvPr id="20" name="Text 17"/>
+          <p:cNvSpPr txBox="1"/>
+          <p:nvPr/>
+        </p:nvSpPr>
+        <p:spPr>
+          <a:xfrm>
+            <a:off x="9000058" y="91440"/>
+            <a:ext cx="2606421" cy="274320"/>
+          </a:xfrm>
+          <a:prstGeom prst="rect">
+            <a:avLst/>
+          </a:prstGeom>
+          <a:noFill/>
+          <a:ln/>
+        </p:spPr>
+        <p:txBody>
+          <a:bodyPr wrap="square" lIns="0" tIns="0" rIns="0" bIns="0" rtlCol="0" anchor="ctr"/>
+          <a:lstStyle/>
+          <a:p>
+            <a:pPr indent="0" marL="0">
+              <a:buNone/>
+            </a:pPr>
+            <a:r>
+              <a:rPr lang="en-US" sz="1100" b="1" dirty="0">
+                <a:solidFill>
+                  <a:srgbClr val="075985"/>
+                </a:solidFill>
+                <a:latin typeface="Calibri" pitchFamily="34" charset="0"/>
+                <a:ea typeface="Calibri" pitchFamily="34" charset="-122"/>
+                <a:cs typeface="Calibri" pitchFamily="34" charset="-120"/>
+              </a:rPr>
+              <a:t>UNDERSTAND NOW</a:t>
+            </a:r>
+            <a:pPr indent="0" marL="0">
+              <a:buNone/>
+            </a:pPr>
+            <a:r>
+              <a:rPr lang="en-US" sz="1100" dirty="0">
+                <a:solidFill>
+                  <a:srgbClr val="075985"/>
+                </a:solidFill>
+                <a:latin typeface="Calibri" pitchFamily="34" charset="0"/>
+                <a:ea typeface="Calibri" pitchFamily="34" charset="-122"/>
+                <a:cs typeface="Calibri" pitchFamily="34" charset="-120"/>
+              </a:rPr>
+              <a:t> · arrays in memory</a:t>
+            </a:r>
+            <a:endParaRPr lang="en-US" sz="1100" dirty="0"/>
+          </a:p>
+        </p:txBody>
+      </p:sp>
+      <p:sp>
+        <p:nvSpPr>
           <p:cNvPr id="25" name="Slide Number Placeholder 0"/>
           <p:cNvSpPr>
             <a:spLocks noGrp="1"/>
@@ -19790,6 +21706,133 @@
       </p:sp>
       <p:sp>
         <p:nvSpPr>
+          <p:cNvPr id="17" name="Shape 15"/>
+          <p:cNvSpPr/>
+          <p:nvPr/>
+        </p:nvSpPr>
+        <p:spPr>
+          <a:xfrm>
+            <a:off x="8616010" y="91440"/>
+            <a:ext cx="3027045" cy="274320"/>
+          </a:xfrm>
+          <a:prstGeom prst="rect">
+            <a:avLst/>
+          </a:prstGeom>
+          <a:solidFill>
+            <a:srgbClr val="E0F2FE"/>
+          </a:solidFill>
+          <a:ln w="12700">
+            <a:solidFill>
+              <a:srgbClr val="0369A1"/>
+            </a:solidFill>
+            <a:prstDash val="solid"/>
+          </a:ln>
+        </p:spPr>
+      </p:sp>
+      <p:sp>
+        <p:nvSpPr>
+          <p:cNvPr id="18" name="Shape 16"/>
+          <p:cNvSpPr/>
+          <p:nvPr/>
+        </p:nvSpPr>
+        <p:spPr>
+          <a:xfrm>
+            <a:off x="8616010" y="91440"/>
+            <a:ext cx="73152" cy="274320"/>
+          </a:xfrm>
+          <a:prstGeom prst="rect">
+            <a:avLst/>
+          </a:prstGeom>
+          <a:solidFill>
+            <a:srgbClr val="0369A1"/>
+          </a:solidFill>
+          <a:ln w="12700">
+            <a:solidFill>
+              <a:srgbClr val="0369A1"/>
+            </a:solidFill>
+            <a:prstDash val="solid"/>
+          </a:ln>
+        </p:spPr>
+      </p:sp>
+      <p:pic>
+        <p:nvPicPr>
+          <p:cNvPr id="19" name="Image 0" descr="preencoded.png">    </p:cNvPr>
+          <p:cNvPicPr>
+            <a:picLocks noChangeAspect="1"/>
+          </p:cNvPicPr>
+          <p:nvPr/>
+        </p:nvPicPr>
+        <p:blipFill>
+          <a:blip r:embed="rId1"/>
+          <a:stretch>
+            <a:fillRect/>
+          </a:stretch>
+        </p:blipFill>
+        <p:spPr>
+          <a:xfrm>
+            <a:off x="8744026" y="128016"/>
+            <a:ext cx="201168" cy="201168"/>
+          </a:xfrm>
+          <a:prstGeom prst="rect">
+            <a:avLst/>
+          </a:prstGeom>
+        </p:spPr>
+      </p:pic>
+      <p:sp>
+        <p:nvSpPr>
+          <p:cNvPr id="20" name="Text 17"/>
+          <p:cNvSpPr txBox="1"/>
+          <p:nvPr/>
+        </p:nvSpPr>
+        <p:spPr>
+          <a:xfrm>
+            <a:off x="9000058" y="91440"/>
+            <a:ext cx="2606421" cy="274320"/>
+          </a:xfrm>
+          <a:prstGeom prst="rect">
+            <a:avLst/>
+          </a:prstGeom>
+          <a:noFill/>
+          <a:ln/>
+        </p:spPr>
+        <p:txBody>
+          <a:bodyPr wrap="square" lIns="0" tIns="0" rIns="0" bIns="0" rtlCol="0" anchor="ctr"/>
+          <a:lstStyle/>
+          <a:p>
+            <a:pPr indent="0" marL="0">
+              <a:buNone/>
+            </a:pPr>
+            <a:r>
+              <a:rPr lang="en-US" sz="1100" b="1" dirty="0">
+                <a:solidFill>
+                  <a:srgbClr val="075985"/>
+                </a:solidFill>
+                <a:latin typeface="Calibri" pitchFamily="34" charset="0"/>
+                <a:ea typeface="Calibri" pitchFamily="34" charset="-122"/>
+                <a:cs typeface="Calibri" pitchFamily="34" charset="-120"/>
+              </a:rPr>
+              <a:t>UNDERSTAND NOW</a:t>
+            </a:r>
+            <a:pPr indent="0" marL="0">
+              <a:buNone/>
+            </a:pPr>
+            <a:r>
+              <a:rPr lang="en-US" sz="1100" dirty="0">
+                <a:solidFill>
+                  <a:srgbClr val="075985"/>
+                </a:solidFill>
+                <a:latin typeface="Calibri" pitchFamily="34" charset="0"/>
+                <a:ea typeface="Calibri" pitchFamily="34" charset="-122"/>
+                <a:cs typeface="Calibri" pitchFamily="34" charset="-120"/>
+              </a:rPr>
+              <a:t> · arrays in memory</a:t>
+            </a:r>
+            <a:endParaRPr lang="en-US" sz="1100" dirty="0"/>
+          </a:p>
+        </p:txBody>
+      </p:sp>
+      <p:sp>
+        <p:nvSpPr>
           <p:cNvPr id="25" name="Slide Number Placeholder 0"/>
           <p:cNvSpPr>
             <a:spLocks noGrp="1"/>
@@ -20889,6 +22932,133 @@
       </p:sp>
       <p:sp>
         <p:nvSpPr>
+          <p:cNvPr id="17" name="Shape 15"/>
+          <p:cNvSpPr/>
+          <p:nvPr/>
+        </p:nvSpPr>
+        <p:spPr>
+          <a:xfrm>
+            <a:off x="8616010" y="91440"/>
+            <a:ext cx="3027045" cy="274320"/>
+          </a:xfrm>
+          <a:prstGeom prst="rect">
+            <a:avLst/>
+          </a:prstGeom>
+          <a:solidFill>
+            <a:srgbClr val="E0F2FE"/>
+          </a:solidFill>
+          <a:ln w="12700">
+            <a:solidFill>
+              <a:srgbClr val="0369A1"/>
+            </a:solidFill>
+            <a:prstDash val="solid"/>
+          </a:ln>
+        </p:spPr>
+      </p:sp>
+      <p:sp>
+        <p:nvSpPr>
+          <p:cNvPr id="18" name="Shape 16"/>
+          <p:cNvSpPr/>
+          <p:nvPr/>
+        </p:nvSpPr>
+        <p:spPr>
+          <a:xfrm>
+            <a:off x="8616010" y="91440"/>
+            <a:ext cx="73152" cy="274320"/>
+          </a:xfrm>
+          <a:prstGeom prst="rect">
+            <a:avLst/>
+          </a:prstGeom>
+          <a:solidFill>
+            <a:srgbClr val="0369A1"/>
+          </a:solidFill>
+          <a:ln w="12700">
+            <a:solidFill>
+              <a:srgbClr val="0369A1"/>
+            </a:solidFill>
+            <a:prstDash val="solid"/>
+          </a:ln>
+        </p:spPr>
+      </p:sp>
+      <p:pic>
+        <p:nvPicPr>
+          <p:cNvPr id="19" name="Image 0" descr="preencoded.png">    </p:cNvPr>
+          <p:cNvPicPr>
+            <a:picLocks noChangeAspect="1"/>
+          </p:cNvPicPr>
+          <p:nvPr/>
+        </p:nvPicPr>
+        <p:blipFill>
+          <a:blip r:embed="rId1"/>
+          <a:stretch>
+            <a:fillRect/>
+          </a:stretch>
+        </p:blipFill>
+        <p:spPr>
+          <a:xfrm>
+            <a:off x="8744026" y="128016"/>
+            <a:ext cx="201168" cy="201168"/>
+          </a:xfrm>
+          <a:prstGeom prst="rect">
+            <a:avLst/>
+          </a:prstGeom>
+        </p:spPr>
+      </p:pic>
+      <p:sp>
+        <p:nvSpPr>
+          <p:cNvPr id="20" name="Text 17"/>
+          <p:cNvSpPr txBox="1"/>
+          <p:nvPr/>
+        </p:nvSpPr>
+        <p:spPr>
+          <a:xfrm>
+            <a:off x="9000058" y="91440"/>
+            <a:ext cx="2606421" cy="274320"/>
+          </a:xfrm>
+          <a:prstGeom prst="rect">
+            <a:avLst/>
+          </a:prstGeom>
+          <a:noFill/>
+          <a:ln/>
+        </p:spPr>
+        <p:txBody>
+          <a:bodyPr wrap="square" lIns="0" tIns="0" rIns="0" bIns="0" rtlCol="0" anchor="ctr"/>
+          <a:lstStyle/>
+          <a:p>
+            <a:pPr indent="0" marL="0">
+              <a:buNone/>
+            </a:pPr>
+            <a:r>
+              <a:rPr lang="en-US" sz="1100" b="1" dirty="0">
+                <a:solidFill>
+                  <a:srgbClr val="075985"/>
+                </a:solidFill>
+                <a:latin typeface="Calibri" pitchFamily="34" charset="0"/>
+                <a:ea typeface="Calibri" pitchFamily="34" charset="-122"/>
+                <a:cs typeface="Calibri" pitchFamily="34" charset="-120"/>
+              </a:rPr>
+              <a:t>UNDERSTAND NOW</a:t>
+            </a:r>
+            <a:pPr indent="0" marL="0">
+              <a:buNone/>
+            </a:pPr>
+            <a:r>
+              <a:rPr lang="en-US" sz="1100" dirty="0">
+                <a:solidFill>
+                  <a:srgbClr val="075985"/>
+                </a:solidFill>
+                <a:latin typeface="Calibri" pitchFamily="34" charset="0"/>
+                <a:ea typeface="Calibri" pitchFamily="34" charset="-122"/>
+                <a:cs typeface="Calibri" pitchFamily="34" charset="-120"/>
+              </a:rPr>
+              <a:t> · arrays in memory</a:t>
+            </a:r>
+            <a:endParaRPr lang="en-US" sz="1100" dirty="0"/>
+          </a:p>
+        </p:txBody>
+      </p:sp>
+      <p:sp>
+        <p:nvSpPr>
           <p:cNvPr id="25" name="Slide Number Placeholder 0"/>
           <p:cNvSpPr>
             <a:spLocks noGrp="1"/>
@@ -21875,6 +24045,172 @@
       </p:sp>
       <p:sp>
         <p:nvSpPr>
+          <p:cNvPr id="14" name="Shape 12"/>
+          <p:cNvSpPr/>
+          <p:nvPr/>
+        </p:nvSpPr>
+        <p:spPr>
+          <a:xfrm>
+            <a:off x="7865821" y="91440"/>
+            <a:ext cx="3777234" cy="274320"/>
+          </a:xfrm>
+          <a:prstGeom prst="rect">
+            <a:avLst/>
+          </a:prstGeom>
+          <a:solidFill>
+            <a:srgbClr val="FEF3C7"/>
+          </a:solidFill>
+          <a:ln w="12700">
+            <a:solidFill>
+              <a:srgbClr val="B45309"/>
+            </a:solidFill>
+            <a:prstDash val="solid"/>
+          </a:ln>
+        </p:spPr>
+      </p:sp>
+      <p:sp>
+        <p:nvSpPr>
+          <p:cNvPr id="15" name="Shape 13"/>
+          <p:cNvSpPr/>
+          <p:nvPr/>
+        </p:nvSpPr>
+        <p:spPr>
+          <a:xfrm>
+            <a:off x="7865821" y="91440"/>
+            <a:ext cx="27432" cy="274320"/>
+          </a:xfrm>
+          <a:prstGeom prst="rect">
+            <a:avLst/>
+          </a:prstGeom>
+          <a:solidFill>
+            <a:srgbClr val="B45309"/>
+          </a:solidFill>
+          <a:ln w="12700">
+            <a:solidFill>
+              <a:srgbClr val="B45309"/>
+            </a:solidFill>
+            <a:prstDash val="solid"/>
+          </a:ln>
+        </p:spPr>
+      </p:sp>
+      <p:sp>
+        <p:nvSpPr>
+          <p:cNvPr id="16" name="Shape 14"/>
+          <p:cNvSpPr/>
+          <p:nvPr/>
+        </p:nvSpPr>
+        <p:spPr>
+          <a:xfrm>
+            <a:off x="7920685" y="91440"/>
+            <a:ext cx="27432" cy="274320"/>
+          </a:xfrm>
+          <a:prstGeom prst="rect">
+            <a:avLst/>
+          </a:prstGeom>
+          <a:solidFill>
+            <a:srgbClr val="B45309"/>
+          </a:solidFill>
+          <a:ln w="12700">
+            <a:solidFill>
+              <a:srgbClr val="B45309"/>
+            </a:solidFill>
+            <a:prstDash val="solid"/>
+          </a:ln>
+        </p:spPr>
+      </p:sp>
+      <p:pic>
+        <p:nvPicPr>
+          <p:cNvPr id="17" name="Image 0" descr="preencoded.png">    </p:cNvPr>
+          <p:cNvPicPr>
+            <a:picLocks noChangeAspect="1"/>
+          </p:cNvPicPr>
+          <p:nvPr/>
+        </p:nvPicPr>
+        <p:blipFill>
+          <a:blip r:embed="rId1"/>
+          <a:stretch>
+            <a:fillRect/>
+          </a:stretch>
+        </p:blipFill>
+        <p:spPr>
+          <a:xfrm>
+            <a:off x="7993837" y="128016"/>
+            <a:ext cx="201168" cy="201168"/>
+          </a:xfrm>
+          <a:prstGeom prst="rect">
+            <a:avLst/>
+          </a:prstGeom>
+        </p:spPr>
+      </p:pic>
+      <p:sp>
+        <p:nvSpPr>
+          <p:cNvPr id="18" name="Text 15"/>
+          <p:cNvSpPr txBox="1"/>
+          <p:nvPr/>
+        </p:nvSpPr>
+        <p:spPr>
+          <a:xfrm>
+            <a:off x="8249869" y="91440"/>
+            <a:ext cx="3356610" cy="274320"/>
+          </a:xfrm>
+          <a:prstGeom prst="rect">
+            <a:avLst/>
+          </a:prstGeom>
+          <a:noFill/>
+          <a:ln/>
+        </p:spPr>
+        <p:txBody>
+          <a:bodyPr wrap="square" lIns="0" tIns="0" rIns="0" bIns="0" rtlCol="0" anchor="ctr"/>
+          <a:lstStyle/>
+          <a:p>
+            <a:pPr indent="0" marL="0">
+              <a:buNone/>
+            </a:pPr>
+            <a:r>
+              <a:rPr lang="en-US" sz="1100" b="1" dirty="0">
+                <a:solidFill>
+                  <a:srgbClr val="92400E"/>
+                </a:solidFill>
+                <a:latin typeface="Calibri" pitchFamily="34" charset="0"/>
+                <a:ea typeface="Calibri" pitchFamily="34" charset="-122"/>
+                <a:cs typeface="Calibri" pitchFamily="34" charset="-120"/>
+              </a:rPr>
+              <a:t>USE NOW</a:t>
+            </a:r>
+            <a:pPr indent="0" marL="0">
+              <a:buNone/>
+            </a:pPr>
+            <a:r>
+              <a:rPr lang="en-US" sz="1100" dirty="0">
+                <a:solidFill>
+                  <a:srgbClr val="92400E"/>
+                </a:solidFill>
+                <a:latin typeface="Calibri" pitchFamily="34" charset="0"/>
+                <a:ea typeface="Calibri" pitchFamily="34" charset="-122"/>
+                <a:cs typeface="Calibri" pitchFamily="34" charset="-120"/>
+              </a:rPr>
+              <a:t> · the calling convention</a:t>
+            </a:r>
+            <a:pPr indent="0" marL="0">
+              <a:buNone/>
+            </a:pPr>
+            <a:r>
+              <a:rPr lang="en-US" sz="1100" b="1" dirty="0">
+                <a:solidFill>
+                  <a:srgbClr val="92400E"/>
+                </a:solidFill>
+                <a:latin typeface="Calibri" pitchFamily="34" charset="0"/>
+                <a:ea typeface="Calibri" pitchFamily="34" charset="-122"/>
+                <a:cs typeface="Calibri" pitchFamily="34" charset="-120"/>
+              </a:rPr>
+              <a:t> → Lecture 18</a:t>
+            </a:r>
+            <a:endParaRPr lang="en-US" sz="1100" dirty="0"/>
+          </a:p>
+        </p:txBody>
+      </p:sp>
+      <p:sp>
+        <p:nvSpPr>
           <p:cNvPr id="25" name="Slide Number Placeholder 0"/>
           <p:cNvSpPr>
             <a:spLocks noGrp="1"/>
@@ -22839,6 +25175,158 @@
       </p:sp>
       <p:sp>
         <p:nvSpPr>
+          <p:cNvPr id="5" name="Shape 3"/>
+          <p:cNvSpPr/>
+          <p:nvPr/>
+        </p:nvSpPr>
+        <p:spPr>
+          <a:xfrm>
+            <a:off x="9287967" y="91440"/>
+            <a:ext cx="2355088" cy="274320"/>
+          </a:xfrm>
+          <a:prstGeom prst="rect">
+            <a:avLst/>
+          </a:prstGeom>
+          <a:solidFill>
+            <a:srgbClr val="FEF3C7"/>
+          </a:solidFill>
+          <a:ln w="12700">
+            <a:solidFill>
+              <a:srgbClr val="B45309"/>
+            </a:solidFill>
+            <a:prstDash val="solid"/>
+          </a:ln>
+        </p:spPr>
+      </p:sp>
+      <p:sp>
+        <p:nvSpPr>
+          <p:cNvPr id="6" name="Shape 4"/>
+          <p:cNvSpPr/>
+          <p:nvPr/>
+        </p:nvSpPr>
+        <p:spPr>
+          <a:xfrm>
+            <a:off x="9287967" y="91440"/>
+            <a:ext cx="27432" cy="274320"/>
+          </a:xfrm>
+          <a:prstGeom prst="rect">
+            <a:avLst/>
+          </a:prstGeom>
+          <a:solidFill>
+            <a:srgbClr val="B45309"/>
+          </a:solidFill>
+          <a:ln w="12700">
+            <a:solidFill>
+              <a:srgbClr val="B45309"/>
+            </a:solidFill>
+            <a:prstDash val="solid"/>
+          </a:ln>
+        </p:spPr>
+      </p:sp>
+      <p:sp>
+        <p:nvSpPr>
+          <p:cNvPr id="7" name="Shape 5"/>
+          <p:cNvSpPr/>
+          <p:nvPr/>
+        </p:nvSpPr>
+        <p:spPr>
+          <a:xfrm>
+            <a:off x="9342831" y="91440"/>
+            <a:ext cx="27432" cy="274320"/>
+          </a:xfrm>
+          <a:prstGeom prst="rect">
+            <a:avLst/>
+          </a:prstGeom>
+          <a:solidFill>
+            <a:srgbClr val="B45309"/>
+          </a:solidFill>
+          <a:ln w="12700">
+            <a:solidFill>
+              <a:srgbClr val="B45309"/>
+            </a:solidFill>
+            <a:prstDash val="solid"/>
+          </a:ln>
+        </p:spPr>
+      </p:sp>
+      <p:pic>
+        <p:nvPicPr>
+          <p:cNvPr id="8" name="Image 0" descr="preencoded.png">    </p:cNvPr>
+          <p:cNvPicPr>
+            <a:picLocks noChangeAspect="1"/>
+          </p:cNvPicPr>
+          <p:nvPr/>
+        </p:nvPicPr>
+        <p:blipFill>
+          <a:blip r:embed="rId1"/>
+          <a:stretch>
+            <a:fillRect/>
+          </a:stretch>
+        </p:blipFill>
+        <p:spPr>
+          <a:xfrm>
+            <a:off x="9415983" y="128016"/>
+            <a:ext cx="201168" cy="201168"/>
+          </a:xfrm>
+          <a:prstGeom prst="rect">
+            <a:avLst/>
+          </a:prstGeom>
+        </p:spPr>
+      </p:pic>
+      <p:sp>
+        <p:nvSpPr>
+          <p:cNvPr id="9" name="Text 6"/>
+          <p:cNvSpPr txBox="1"/>
+          <p:nvPr/>
+        </p:nvSpPr>
+        <p:spPr>
+          <a:xfrm>
+            <a:off x="9672015" y="91440"/>
+            <a:ext cx="1934464" cy="274320"/>
+          </a:xfrm>
+          <a:prstGeom prst="rect">
+            <a:avLst/>
+          </a:prstGeom>
+          <a:noFill/>
+          <a:ln/>
+        </p:spPr>
+        <p:txBody>
+          <a:bodyPr wrap="square" lIns="0" tIns="0" rIns="0" bIns="0" rtlCol="0" anchor="ctr"/>
+          <a:lstStyle/>
+          <a:p>
+            <a:pPr indent="0" marL="0">
+              <a:buNone/>
+            </a:pPr>
+            <a:r>
+              <a:rPr lang="en-US" sz="1100" b="1" dirty="0">
+                <a:solidFill>
+                  <a:srgbClr val="92400E"/>
+                </a:solidFill>
+                <a:latin typeface="Calibri" pitchFamily="34" charset="0"/>
+                <a:ea typeface="Calibri" pitchFamily="34" charset="-122"/>
+                <a:cs typeface="Calibri" pitchFamily="34" charset="-120"/>
+              </a:rPr>
+              <a:t>USE NOW</a:t>
+            </a:r>
+            <a:pPr indent="0" marL="0">
+              <a:buNone/>
+            </a:pPr>
+            <a:r>
+              <a:rPr lang="en-US" sz="1100" dirty="0">
+                <a:solidFill>
+                  <a:srgbClr val="92400E"/>
+                </a:solidFill>
+                <a:latin typeface="Calibri" pitchFamily="34" charset="0"/>
+                <a:ea typeface="Calibri" pitchFamily="34" charset="-122"/>
+                <a:cs typeface="Calibri" pitchFamily="34" charset="-120"/>
+              </a:rPr>
+              <a:t> · the PRG32 tools</a:t>
+            </a:r>
+            <a:endParaRPr lang="en-US" sz="1100" dirty="0"/>
+          </a:p>
+        </p:txBody>
+      </p:sp>
+      <p:sp>
+        <p:nvSpPr>
           <p:cNvPr id="25" name="Slide Number Placeholder 0"/>
           <p:cNvSpPr>
             <a:spLocks noGrp="1"/>
@@ -25095,6 +27583,158 @@
       </p:sp>
       <p:sp>
         <p:nvSpPr>
+          <p:cNvPr id="17" name="Shape 15"/>
+          <p:cNvSpPr/>
+          <p:nvPr/>
+        </p:nvSpPr>
+        <p:spPr>
+          <a:xfrm>
+            <a:off x="9287967" y="91440"/>
+            <a:ext cx="2355088" cy="274320"/>
+          </a:xfrm>
+          <a:prstGeom prst="rect">
+            <a:avLst/>
+          </a:prstGeom>
+          <a:solidFill>
+            <a:srgbClr val="FEF3C7"/>
+          </a:solidFill>
+          <a:ln w="12700">
+            <a:solidFill>
+              <a:srgbClr val="B45309"/>
+            </a:solidFill>
+            <a:prstDash val="solid"/>
+          </a:ln>
+        </p:spPr>
+      </p:sp>
+      <p:sp>
+        <p:nvSpPr>
+          <p:cNvPr id="18" name="Shape 16"/>
+          <p:cNvSpPr/>
+          <p:nvPr/>
+        </p:nvSpPr>
+        <p:spPr>
+          <a:xfrm>
+            <a:off x="9287967" y="91440"/>
+            <a:ext cx="27432" cy="274320"/>
+          </a:xfrm>
+          <a:prstGeom prst="rect">
+            <a:avLst/>
+          </a:prstGeom>
+          <a:solidFill>
+            <a:srgbClr val="B45309"/>
+          </a:solidFill>
+          <a:ln w="12700">
+            <a:solidFill>
+              <a:srgbClr val="B45309"/>
+            </a:solidFill>
+            <a:prstDash val="solid"/>
+          </a:ln>
+        </p:spPr>
+      </p:sp>
+      <p:sp>
+        <p:nvSpPr>
+          <p:cNvPr id="19" name="Shape 17"/>
+          <p:cNvSpPr/>
+          <p:nvPr/>
+        </p:nvSpPr>
+        <p:spPr>
+          <a:xfrm>
+            <a:off x="9342831" y="91440"/>
+            <a:ext cx="27432" cy="274320"/>
+          </a:xfrm>
+          <a:prstGeom prst="rect">
+            <a:avLst/>
+          </a:prstGeom>
+          <a:solidFill>
+            <a:srgbClr val="B45309"/>
+          </a:solidFill>
+          <a:ln w="12700">
+            <a:solidFill>
+              <a:srgbClr val="B45309"/>
+            </a:solidFill>
+            <a:prstDash val="solid"/>
+          </a:ln>
+        </p:spPr>
+      </p:sp>
+      <p:pic>
+        <p:nvPicPr>
+          <p:cNvPr id="20" name="Image 0" descr="preencoded.png">    </p:cNvPr>
+          <p:cNvPicPr>
+            <a:picLocks noChangeAspect="1"/>
+          </p:cNvPicPr>
+          <p:nvPr/>
+        </p:nvPicPr>
+        <p:blipFill>
+          <a:blip r:embed="rId1"/>
+          <a:stretch>
+            <a:fillRect/>
+          </a:stretch>
+        </p:blipFill>
+        <p:spPr>
+          <a:xfrm>
+            <a:off x="9415983" y="128016"/>
+            <a:ext cx="201168" cy="201168"/>
+          </a:xfrm>
+          <a:prstGeom prst="rect">
+            <a:avLst/>
+          </a:prstGeom>
+        </p:spPr>
+      </p:pic>
+      <p:sp>
+        <p:nvSpPr>
+          <p:cNvPr id="21" name="Text 18"/>
+          <p:cNvSpPr txBox="1"/>
+          <p:nvPr/>
+        </p:nvSpPr>
+        <p:spPr>
+          <a:xfrm>
+            <a:off x="9672015" y="91440"/>
+            <a:ext cx="1934464" cy="274320"/>
+          </a:xfrm>
+          <a:prstGeom prst="rect">
+            <a:avLst/>
+          </a:prstGeom>
+          <a:noFill/>
+          <a:ln/>
+        </p:spPr>
+        <p:txBody>
+          <a:bodyPr wrap="square" lIns="0" tIns="0" rIns="0" bIns="0" rtlCol="0" anchor="ctr"/>
+          <a:lstStyle/>
+          <a:p>
+            <a:pPr indent="0" marL="0">
+              <a:buNone/>
+            </a:pPr>
+            <a:r>
+              <a:rPr lang="en-US" sz="1100" b="1" dirty="0">
+                <a:solidFill>
+                  <a:srgbClr val="92400E"/>
+                </a:solidFill>
+                <a:latin typeface="Calibri" pitchFamily="34" charset="0"/>
+                <a:ea typeface="Calibri" pitchFamily="34" charset="-122"/>
+                <a:cs typeface="Calibri" pitchFamily="34" charset="-120"/>
+              </a:rPr>
+              <a:t>USE NOW</a:t>
+            </a:r>
+            <a:pPr indent="0" marL="0">
+              <a:buNone/>
+            </a:pPr>
+            <a:r>
+              <a:rPr lang="en-US" sz="1100" dirty="0">
+                <a:solidFill>
+                  <a:srgbClr val="92400E"/>
+                </a:solidFill>
+                <a:latin typeface="Calibri" pitchFamily="34" charset="0"/>
+                <a:ea typeface="Calibri" pitchFamily="34" charset="-122"/>
+                <a:cs typeface="Calibri" pitchFamily="34" charset="-120"/>
+              </a:rPr>
+              <a:t> · the PRG32 tools</a:t>
+            </a:r>
+            <a:endParaRPr lang="en-US" sz="1100" dirty="0"/>
+          </a:p>
+        </p:txBody>
+      </p:sp>
+      <p:sp>
+        <p:nvSpPr>
           <p:cNvPr id="25" name="Slide Number Placeholder 0"/>
           <p:cNvSpPr>
             <a:spLocks noGrp="1"/>
@@ -25931,6 +28571,158 @@
       </p:sp>
       <p:sp>
         <p:nvSpPr>
+          <p:cNvPr id="17" name="Shape 15"/>
+          <p:cNvSpPr/>
+          <p:nvPr/>
+        </p:nvSpPr>
+        <p:spPr>
+          <a:xfrm>
+            <a:off x="9287967" y="91440"/>
+            <a:ext cx="2355088" cy="274320"/>
+          </a:xfrm>
+          <a:prstGeom prst="rect">
+            <a:avLst/>
+          </a:prstGeom>
+          <a:solidFill>
+            <a:srgbClr val="FEF3C7"/>
+          </a:solidFill>
+          <a:ln w="12700">
+            <a:solidFill>
+              <a:srgbClr val="B45309"/>
+            </a:solidFill>
+            <a:prstDash val="solid"/>
+          </a:ln>
+        </p:spPr>
+      </p:sp>
+      <p:sp>
+        <p:nvSpPr>
+          <p:cNvPr id="18" name="Shape 16"/>
+          <p:cNvSpPr/>
+          <p:nvPr/>
+        </p:nvSpPr>
+        <p:spPr>
+          <a:xfrm>
+            <a:off x="9287967" y="91440"/>
+            <a:ext cx="27432" cy="274320"/>
+          </a:xfrm>
+          <a:prstGeom prst="rect">
+            <a:avLst/>
+          </a:prstGeom>
+          <a:solidFill>
+            <a:srgbClr val="B45309"/>
+          </a:solidFill>
+          <a:ln w="12700">
+            <a:solidFill>
+              <a:srgbClr val="B45309"/>
+            </a:solidFill>
+            <a:prstDash val="solid"/>
+          </a:ln>
+        </p:spPr>
+      </p:sp>
+      <p:sp>
+        <p:nvSpPr>
+          <p:cNvPr id="19" name="Shape 17"/>
+          <p:cNvSpPr/>
+          <p:nvPr/>
+        </p:nvSpPr>
+        <p:spPr>
+          <a:xfrm>
+            <a:off x="9342831" y="91440"/>
+            <a:ext cx="27432" cy="274320"/>
+          </a:xfrm>
+          <a:prstGeom prst="rect">
+            <a:avLst/>
+          </a:prstGeom>
+          <a:solidFill>
+            <a:srgbClr val="B45309"/>
+          </a:solidFill>
+          <a:ln w="12700">
+            <a:solidFill>
+              <a:srgbClr val="B45309"/>
+            </a:solidFill>
+            <a:prstDash val="solid"/>
+          </a:ln>
+        </p:spPr>
+      </p:sp>
+      <p:pic>
+        <p:nvPicPr>
+          <p:cNvPr id="20" name="Image 0" descr="preencoded.png">    </p:cNvPr>
+          <p:cNvPicPr>
+            <a:picLocks noChangeAspect="1"/>
+          </p:cNvPicPr>
+          <p:nvPr/>
+        </p:nvPicPr>
+        <p:blipFill>
+          <a:blip r:embed="rId1"/>
+          <a:stretch>
+            <a:fillRect/>
+          </a:stretch>
+        </p:blipFill>
+        <p:spPr>
+          <a:xfrm>
+            <a:off x="9415983" y="128016"/>
+            <a:ext cx="201168" cy="201168"/>
+          </a:xfrm>
+          <a:prstGeom prst="rect">
+            <a:avLst/>
+          </a:prstGeom>
+        </p:spPr>
+      </p:pic>
+      <p:sp>
+        <p:nvSpPr>
+          <p:cNvPr id="21" name="Text 18"/>
+          <p:cNvSpPr txBox="1"/>
+          <p:nvPr/>
+        </p:nvSpPr>
+        <p:spPr>
+          <a:xfrm>
+            <a:off x="9672015" y="91440"/>
+            <a:ext cx="1934464" cy="274320"/>
+          </a:xfrm>
+          <a:prstGeom prst="rect">
+            <a:avLst/>
+          </a:prstGeom>
+          <a:noFill/>
+          <a:ln/>
+        </p:spPr>
+        <p:txBody>
+          <a:bodyPr wrap="square" lIns="0" tIns="0" rIns="0" bIns="0" rtlCol="0" anchor="ctr"/>
+          <a:lstStyle/>
+          <a:p>
+            <a:pPr indent="0" marL="0">
+              <a:buNone/>
+            </a:pPr>
+            <a:r>
+              <a:rPr lang="en-US" sz="1100" b="1" dirty="0">
+                <a:solidFill>
+                  <a:srgbClr val="92400E"/>
+                </a:solidFill>
+                <a:latin typeface="Calibri" pitchFamily="34" charset="0"/>
+                <a:ea typeface="Calibri" pitchFamily="34" charset="-122"/>
+                <a:cs typeface="Calibri" pitchFamily="34" charset="-120"/>
+              </a:rPr>
+              <a:t>USE NOW</a:t>
+            </a:r>
+            <a:pPr indent="0" marL="0">
+              <a:buNone/>
+            </a:pPr>
+            <a:r>
+              <a:rPr lang="en-US" sz="1100" dirty="0">
+                <a:solidFill>
+                  <a:srgbClr val="92400E"/>
+                </a:solidFill>
+                <a:latin typeface="Calibri" pitchFamily="34" charset="0"/>
+                <a:ea typeface="Calibri" pitchFamily="34" charset="-122"/>
+                <a:cs typeface="Calibri" pitchFamily="34" charset="-120"/>
+              </a:rPr>
+              <a:t> · the PRG32 tools</a:t>
+            </a:r>
+            <a:endParaRPr lang="en-US" sz="1100" dirty="0"/>
+          </a:p>
+        </p:txBody>
+      </p:sp>
+      <p:sp>
+        <p:nvSpPr>
           <p:cNvPr id="25" name="Slide Number Placeholder 0"/>
           <p:cNvSpPr>
             <a:spLocks noGrp="1"/>
@@ -26762,6 +29554,158 @@
               <a:t>A black screen: check the wiring of the display against the firmware</a:t>
             </a:r>
             <a:endParaRPr lang="en-US" sz="1200" dirty="0"/>
+          </a:p>
+        </p:txBody>
+      </p:sp>
+      <p:sp>
+        <p:nvSpPr>
+          <p:cNvPr id="17" name="Shape 15"/>
+          <p:cNvSpPr/>
+          <p:nvPr/>
+        </p:nvSpPr>
+        <p:spPr>
+          <a:xfrm>
+            <a:off x="9287967" y="91440"/>
+            <a:ext cx="2355088" cy="274320"/>
+          </a:xfrm>
+          <a:prstGeom prst="rect">
+            <a:avLst/>
+          </a:prstGeom>
+          <a:solidFill>
+            <a:srgbClr val="FEF3C7"/>
+          </a:solidFill>
+          <a:ln w="12700">
+            <a:solidFill>
+              <a:srgbClr val="B45309"/>
+            </a:solidFill>
+            <a:prstDash val="solid"/>
+          </a:ln>
+        </p:spPr>
+      </p:sp>
+      <p:sp>
+        <p:nvSpPr>
+          <p:cNvPr id="18" name="Shape 16"/>
+          <p:cNvSpPr/>
+          <p:nvPr/>
+        </p:nvSpPr>
+        <p:spPr>
+          <a:xfrm>
+            <a:off x="9287967" y="91440"/>
+            <a:ext cx="27432" cy="274320"/>
+          </a:xfrm>
+          <a:prstGeom prst="rect">
+            <a:avLst/>
+          </a:prstGeom>
+          <a:solidFill>
+            <a:srgbClr val="B45309"/>
+          </a:solidFill>
+          <a:ln w="12700">
+            <a:solidFill>
+              <a:srgbClr val="B45309"/>
+            </a:solidFill>
+            <a:prstDash val="solid"/>
+          </a:ln>
+        </p:spPr>
+      </p:sp>
+      <p:sp>
+        <p:nvSpPr>
+          <p:cNvPr id="19" name="Shape 17"/>
+          <p:cNvSpPr/>
+          <p:nvPr/>
+        </p:nvSpPr>
+        <p:spPr>
+          <a:xfrm>
+            <a:off x="9342831" y="91440"/>
+            <a:ext cx="27432" cy="274320"/>
+          </a:xfrm>
+          <a:prstGeom prst="rect">
+            <a:avLst/>
+          </a:prstGeom>
+          <a:solidFill>
+            <a:srgbClr val="B45309"/>
+          </a:solidFill>
+          <a:ln w="12700">
+            <a:solidFill>
+              <a:srgbClr val="B45309"/>
+            </a:solidFill>
+            <a:prstDash val="solid"/>
+          </a:ln>
+        </p:spPr>
+      </p:sp>
+      <p:pic>
+        <p:nvPicPr>
+          <p:cNvPr id="20" name="Image 0" descr="preencoded.png">    </p:cNvPr>
+          <p:cNvPicPr>
+            <a:picLocks noChangeAspect="1"/>
+          </p:cNvPicPr>
+          <p:nvPr/>
+        </p:nvPicPr>
+        <p:blipFill>
+          <a:blip r:embed="rId1"/>
+          <a:stretch>
+            <a:fillRect/>
+          </a:stretch>
+        </p:blipFill>
+        <p:spPr>
+          <a:xfrm>
+            <a:off x="9415983" y="128016"/>
+            <a:ext cx="201168" cy="201168"/>
+          </a:xfrm>
+          <a:prstGeom prst="rect">
+            <a:avLst/>
+          </a:prstGeom>
+        </p:spPr>
+      </p:pic>
+      <p:sp>
+        <p:nvSpPr>
+          <p:cNvPr id="21" name="Text 18"/>
+          <p:cNvSpPr txBox="1"/>
+          <p:nvPr/>
+        </p:nvSpPr>
+        <p:spPr>
+          <a:xfrm>
+            <a:off x="9672015" y="91440"/>
+            <a:ext cx="1934464" cy="274320"/>
+          </a:xfrm>
+          <a:prstGeom prst="rect">
+            <a:avLst/>
+          </a:prstGeom>
+          <a:noFill/>
+          <a:ln/>
+        </p:spPr>
+        <p:txBody>
+          <a:bodyPr wrap="square" lIns="0" tIns="0" rIns="0" bIns="0" rtlCol="0" anchor="ctr"/>
+          <a:lstStyle/>
+          <a:p>
+            <a:pPr indent="0" marL="0">
+              <a:buNone/>
+            </a:pPr>
+            <a:r>
+              <a:rPr lang="en-US" sz="1100" b="1" dirty="0">
+                <a:solidFill>
+                  <a:srgbClr val="92400E"/>
+                </a:solidFill>
+                <a:latin typeface="Calibri" pitchFamily="34" charset="0"/>
+                <a:ea typeface="Calibri" pitchFamily="34" charset="-122"/>
+                <a:cs typeface="Calibri" pitchFamily="34" charset="-120"/>
+              </a:rPr>
+              <a:t>USE NOW</a:t>
+            </a:r>
+            <a:pPr indent="0" marL="0">
+              <a:buNone/>
+            </a:pPr>
+            <a:r>
+              <a:rPr lang="en-US" sz="1100" dirty="0">
+                <a:solidFill>
+                  <a:srgbClr val="92400E"/>
+                </a:solidFill>
+                <a:latin typeface="Calibri" pitchFamily="34" charset="0"/>
+                <a:ea typeface="Calibri" pitchFamily="34" charset="-122"/>
+                <a:cs typeface="Calibri" pitchFamily="34" charset="-120"/>
+              </a:rPr>
+              <a:t> · the PRG32 tools</a:t>
+            </a:r>
+            <a:endParaRPr lang="en-US" sz="1100" dirty="0"/>
           </a:p>
         </p:txBody>
       </p:sp>
@@ -28148,6 +31092,158 @@
       </p:graphicFrame>
       <p:sp>
         <p:nvSpPr>
+          <p:cNvPr id="4" name="Shape 1"/>
+          <p:cNvSpPr/>
+          <p:nvPr/>
+        </p:nvSpPr>
+        <p:spPr>
+          <a:xfrm>
+            <a:off x="9287967" y="91440"/>
+            <a:ext cx="2355088" cy="274320"/>
+          </a:xfrm>
+          <a:prstGeom prst="rect">
+            <a:avLst/>
+          </a:prstGeom>
+          <a:solidFill>
+            <a:srgbClr val="FEF3C7"/>
+          </a:solidFill>
+          <a:ln w="12700">
+            <a:solidFill>
+              <a:srgbClr val="B45309"/>
+            </a:solidFill>
+            <a:prstDash val="solid"/>
+          </a:ln>
+        </p:spPr>
+      </p:sp>
+      <p:sp>
+        <p:nvSpPr>
+          <p:cNvPr id="5" name="Shape 2"/>
+          <p:cNvSpPr/>
+          <p:nvPr/>
+        </p:nvSpPr>
+        <p:spPr>
+          <a:xfrm>
+            <a:off x="9287967" y="91440"/>
+            <a:ext cx="27432" cy="274320"/>
+          </a:xfrm>
+          <a:prstGeom prst="rect">
+            <a:avLst/>
+          </a:prstGeom>
+          <a:solidFill>
+            <a:srgbClr val="B45309"/>
+          </a:solidFill>
+          <a:ln w="12700">
+            <a:solidFill>
+              <a:srgbClr val="B45309"/>
+            </a:solidFill>
+            <a:prstDash val="solid"/>
+          </a:ln>
+        </p:spPr>
+      </p:sp>
+      <p:sp>
+        <p:nvSpPr>
+          <p:cNvPr id="6" name="Shape 3"/>
+          <p:cNvSpPr/>
+          <p:nvPr/>
+        </p:nvSpPr>
+        <p:spPr>
+          <a:xfrm>
+            <a:off x="9342831" y="91440"/>
+            <a:ext cx="27432" cy="274320"/>
+          </a:xfrm>
+          <a:prstGeom prst="rect">
+            <a:avLst/>
+          </a:prstGeom>
+          <a:solidFill>
+            <a:srgbClr val="B45309"/>
+          </a:solidFill>
+          <a:ln w="12700">
+            <a:solidFill>
+              <a:srgbClr val="B45309"/>
+            </a:solidFill>
+            <a:prstDash val="solid"/>
+          </a:ln>
+        </p:spPr>
+      </p:sp>
+      <p:pic>
+        <p:nvPicPr>
+          <p:cNvPr id="7" name="Image 0" descr="preencoded.png">    </p:cNvPr>
+          <p:cNvPicPr>
+            <a:picLocks noChangeAspect="1"/>
+          </p:cNvPicPr>
+          <p:nvPr/>
+        </p:nvPicPr>
+        <p:blipFill>
+          <a:blip r:embed="rId1"/>
+          <a:stretch>
+            <a:fillRect/>
+          </a:stretch>
+        </p:blipFill>
+        <p:spPr>
+          <a:xfrm>
+            <a:off x="9415983" y="128016"/>
+            <a:ext cx="201168" cy="201168"/>
+          </a:xfrm>
+          <a:prstGeom prst="rect">
+            <a:avLst/>
+          </a:prstGeom>
+        </p:spPr>
+      </p:pic>
+      <p:sp>
+        <p:nvSpPr>
+          <p:cNvPr id="8" name="Text 4"/>
+          <p:cNvSpPr txBox="1"/>
+          <p:nvPr/>
+        </p:nvSpPr>
+        <p:spPr>
+          <a:xfrm>
+            <a:off x="9672015" y="91440"/>
+            <a:ext cx="1934464" cy="274320"/>
+          </a:xfrm>
+          <a:prstGeom prst="rect">
+            <a:avLst/>
+          </a:prstGeom>
+          <a:noFill/>
+          <a:ln/>
+        </p:spPr>
+        <p:txBody>
+          <a:bodyPr wrap="square" lIns="0" tIns="0" rIns="0" bIns="0" rtlCol="0" anchor="ctr"/>
+          <a:lstStyle/>
+          <a:p>
+            <a:pPr indent="0" marL="0">
+              <a:buNone/>
+            </a:pPr>
+            <a:r>
+              <a:rPr lang="en-US" sz="1100" b="1" dirty="0">
+                <a:solidFill>
+                  <a:srgbClr val="92400E"/>
+                </a:solidFill>
+                <a:latin typeface="Calibri" pitchFamily="34" charset="0"/>
+                <a:ea typeface="Calibri" pitchFamily="34" charset="-122"/>
+                <a:cs typeface="Calibri" pitchFamily="34" charset="-120"/>
+              </a:rPr>
+              <a:t>USE NOW</a:t>
+            </a:r>
+            <a:pPr indent="0" marL="0">
+              <a:buNone/>
+            </a:pPr>
+            <a:r>
+              <a:rPr lang="en-US" sz="1100" dirty="0">
+                <a:solidFill>
+                  <a:srgbClr val="92400E"/>
+                </a:solidFill>
+                <a:latin typeface="Calibri" pitchFamily="34" charset="0"/>
+                <a:ea typeface="Calibri" pitchFamily="34" charset="-122"/>
+                <a:cs typeface="Calibri" pitchFamily="34" charset="-120"/>
+              </a:rPr>
+              <a:t> · the PRG32 tools</a:t>
+            </a:r>
+            <a:endParaRPr lang="en-US" sz="1100" dirty="0"/>
+          </a:p>
+        </p:txBody>
+      </p:sp>
+      <p:sp>
+        <p:nvSpPr>
           <p:cNvPr id="25" name="Slide Number Placeholder 0"/>
           <p:cNvSpPr>
             <a:spLocks noGrp="1"/>
@@ -29888,6 +32984,133 @@
       </p:sp>
       <p:sp>
         <p:nvSpPr>
+          <p:cNvPr id="17" name="Shape 15"/>
+          <p:cNvSpPr/>
+          <p:nvPr/>
+        </p:nvSpPr>
+        <p:spPr>
+          <a:xfrm>
+            <a:off x="8287715" y="91440"/>
+            <a:ext cx="3355340" cy="274320"/>
+          </a:xfrm>
+          <a:prstGeom prst="rect">
+            <a:avLst/>
+          </a:prstGeom>
+          <a:solidFill>
+            <a:srgbClr val="E0F2FE"/>
+          </a:solidFill>
+          <a:ln w="12700">
+            <a:solidFill>
+              <a:srgbClr val="0369A1"/>
+            </a:solidFill>
+            <a:prstDash val="solid"/>
+          </a:ln>
+        </p:spPr>
+      </p:sp>
+      <p:sp>
+        <p:nvSpPr>
+          <p:cNvPr id="18" name="Shape 16"/>
+          <p:cNvSpPr/>
+          <p:nvPr/>
+        </p:nvSpPr>
+        <p:spPr>
+          <a:xfrm>
+            <a:off x="8287715" y="91440"/>
+            <a:ext cx="73152" cy="274320"/>
+          </a:xfrm>
+          <a:prstGeom prst="rect">
+            <a:avLst/>
+          </a:prstGeom>
+          <a:solidFill>
+            <a:srgbClr val="0369A1"/>
+          </a:solidFill>
+          <a:ln w="12700">
+            <a:solidFill>
+              <a:srgbClr val="0369A1"/>
+            </a:solidFill>
+            <a:prstDash val="solid"/>
+          </a:ln>
+        </p:spPr>
+      </p:sp>
+      <p:pic>
+        <p:nvPicPr>
+          <p:cNvPr id="19" name="Image 0" descr="preencoded.png">    </p:cNvPr>
+          <p:cNvPicPr>
+            <a:picLocks noChangeAspect="1"/>
+          </p:cNvPicPr>
+          <p:nvPr/>
+        </p:nvPicPr>
+        <p:blipFill>
+          <a:blip r:embed="rId1"/>
+          <a:stretch>
+            <a:fillRect/>
+          </a:stretch>
+        </p:blipFill>
+        <p:spPr>
+          <a:xfrm>
+            <a:off x="8415731" y="128016"/>
+            <a:ext cx="201168" cy="201168"/>
+          </a:xfrm>
+          <a:prstGeom prst="rect">
+            <a:avLst/>
+          </a:prstGeom>
+        </p:spPr>
+      </p:pic>
+      <p:sp>
+        <p:nvSpPr>
+          <p:cNvPr id="20" name="Text 17"/>
+          <p:cNvSpPr txBox="1"/>
+          <p:nvPr/>
+        </p:nvSpPr>
+        <p:spPr>
+          <a:xfrm>
+            <a:off x="8671763" y="91440"/>
+            <a:ext cx="2934716" cy="274320"/>
+          </a:xfrm>
+          <a:prstGeom prst="rect">
+            <a:avLst/>
+          </a:prstGeom>
+          <a:noFill/>
+          <a:ln/>
+        </p:spPr>
+        <p:txBody>
+          <a:bodyPr wrap="square" lIns="0" tIns="0" rIns="0" bIns="0" rtlCol="0" anchor="ctr"/>
+          <a:lstStyle/>
+          <a:p>
+            <a:pPr indent="0" marL="0">
+              <a:buNone/>
+            </a:pPr>
+            <a:r>
+              <a:rPr lang="en-US" sz="1100" b="1" dirty="0">
+                <a:solidFill>
+                  <a:srgbClr val="075985"/>
+                </a:solidFill>
+                <a:latin typeface="Calibri" pitchFamily="34" charset="0"/>
+                <a:ea typeface="Calibri" pitchFamily="34" charset="-122"/>
+                <a:cs typeface="Calibri" pitchFamily="34" charset="-120"/>
+              </a:rPr>
+              <a:t>UNDERSTAND NOW</a:t>
+            </a:r>
+            <a:pPr indent="0" marL="0">
+              <a:buNone/>
+            </a:pPr>
+            <a:r>
+              <a:rPr lang="en-US" sz="1100" dirty="0">
+                <a:solidFill>
+                  <a:srgbClr val="075985"/>
+                </a:solidFill>
+                <a:latin typeface="Calibri" pitchFamily="34" charset="0"/>
+                <a:ea typeface="Calibri" pitchFamily="34" charset="-122"/>
+                <a:cs typeface="Calibri" pitchFamily="34" charset="-120"/>
+              </a:rPr>
+              <a:t> · finite-state machines</a:t>
+            </a:r>
+            <a:endParaRPr lang="en-US" sz="1100" dirty="0"/>
+          </a:p>
+        </p:txBody>
+      </p:sp>
+      <p:sp>
+        <p:nvSpPr>
           <p:cNvPr id="25" name="Slide Number Placeholder 0"/>
           <p:cNvSpPr>
             <a:spLocks noGrp="1"/>
@@ -30520,6 +33743,133 @@
       </p:sp>
       <p:sp>
         <p:nvSpPr>
+          <p:cNvPr id="14" name="Shape 12"/>
+          <p:cNvSpPr/>
+          <p:nvPr/>
+        </p:nvSpPr>
+        <p:spPr>
+          <a:xfrm>
+            <a:off x="8287715" y="91440"/>
+            <a:ext cx="3355340" cy="274320"/>
+          </a:xfrm>
+          <a:prstGeom prst="rect">
+            <a:avLst/>
+          </a:prstGeom>
+          <a:solidFill>
+            <a:srgbClr val="E0F2FE"/>
+          </a:solidFill>
+          <a:ln w="12700">
+            <a:solidFill>
+              <a:srgbClr val="0369A1"/>
+            </a:solidFill>
+            <a:prstDash val="solid"/>
+          </a:ln>
+        </p:spPr>
+      </p:sp>
+      <p:sp>
+        <p:nvSpPr>
+          <p:cNvPr id="15" name="Shape 13"/>
+          <p:cNvSpPr/>
+          <p:nvPr/>
+        </p:nvSpPr>
+        <p:spPr>
+          <a:xfrm>
+            <a:off x="8287715" y="91440"/>
+            <a:ext cx="73152" cy="274320"/>
+          </a:xfrm>
+          <a:prstGeom prst="rect">
+            <a:avLst/>
+          </a:prstGeom>
+          <a:solidFill>
+            <a:srgbClr val="0369A1"/>
+          </a:solidFill>
+          <a:ln w="12700">
+            <a:solidFill>
+              <a:srgbClr val="0369A1"/>
+            </a:solidFill>
+            <a:prstDash val="solid"/>
+          </a:ln>
+        </p:spPr>
+      </p:sp>
+      <p:pic>
+        <p:nvPicPr>
+          <p:cNvPr id="16" name="Image 0" descr="preencoded.png">    </p:cNvPr>
+          <p:cNvPicPr>
+            <a:picLocks noChangeAspect="1"/>
+          </p:cNvPicPr>
+          <p:nvPr/>
+        </p:nvPicPr>
+        <p:blipFill>
+          <a:blip r:embed="rId1"/>
+          <a:stretch>
+            <a:fillRect/>
+          </a:stretch>
+        </p:blipFill>
+        <p:spPr>
+          <a:xfrm>
+            <a:off x="8415731" y="128016"/>
+            <a:ext cx="201168" cy="201168"/>
+          </a:xfrm>
+          <a:prstGeom prst="rect">
+            <a:avLst/>
+          </a:prstGeom>
+        </p:spPr>
+      </p:pic>
+      <p:sp>
+        <p:nvSpPr>
+          <p:cNvPr id="17" name="Text 14"/>
+          <p:cNvSpPr txBox="1"/>
+          <p:nvPr/>
+        </p:nvSpPr>
+        <p:spPr>
+          <a:xfrm>
+            <a:off x="8671763" y="91440"/>
+            <a:ext cx="2934716" cy="274320"/>
+          </a:xfrm>
+          <a:prstGeom prst="rect">
+            <a:avLst/>
+          </a:prstGeom>
+          <a:noFill/>
+          <a:ln/>
+        </p:spPr>
+        <p:txBody>
+          <a:bodyPr wrap="square" lIns="0" tIns="0" rIns="0" bIns="0" rtlCol="0" anchor="ctr"/>
+          <a:lstStyle/>
+          <a:p>
+            <a:pPr indent="0" marL="0">
+              <a:buNone/>
+            </a:pPr>
+            <a:r>
+              <a:rPr lang="en-US" sz="1100" b="1" dirty="0">
+                <a:solidFill>
+                  <a:srgbClr val="075985"/>
+                </a:solidFill>
+                <a:latin typeface="Calibri" pitchFamily="34" charset="0"/>
+                <a:ea typeface="Calibri" pitchFamily="34" charset="-122"/>
+                <a:cs typeface="Calibri" pitchFamily="34" charset="-120"/>
+              </a:rPr>
+              <a:t>UNDERSTAND NOW</a:t>
+            </a:r>
+            <a:pPr indent="0" marL="0">
+              <a:buNone/>
+            </a:pPr>
+            <a:r>
+              <a:rPr lang="en-US" sz="1100" dirty="0">
+                <a:solidFill>
+                  <a:srgbClr val="075985"/>
+                </a:solidFill>
+                <a:latin typeface="Calibri" pitchFamily="34" charset="0"/>
+                <a:ea typeface="Calibri" pitchFamily="34" charset="-122"/>
+                <a:cs typeface="Calibri" pitchFamily="34" charset="-120"/>
+              </a:rPr>
+              <a:t> · .text, .rodata, .data</a:t>
+            </a:r>
+            <a:endParaRPr lang="en-US" sz="1100" dirty="0"/>
+          </a:p>
+        </p:txBody>
+      </p:sp>
+      <p:sp>
+        <p:nvSpPr>
           <p:cNvPr id="25" name="Slide Number Placeholder 0"/>
           <p:cNvSpPr>
             <a:spLocks noGrp="1"/>
@@ -31488,6 +34838,133 @@
       </p:sp>
       <p:sp>
         <p:nvSpPr>
+          <p:cNvPr id="17" name="Shape 15"/>
+          <p:cNvSpPr/>
+          <p:nvPr/>
+        </p:nvSpPr>
+        <p:spPr>
+          <a:xfrm>
+            <a:off x="8287715" y="91440"/>
+            <a:ext cx="3355340" cy="274320"/>
+          </a:xfrm>
+          <a:prstGeom prst="rect">
+            <a:avLst/>
+          </a:prstGeom>
+          <a:solidFill>
+            <a:srgbClr val="E0F2FE"/>
+          </a:solidFill>
+          <a:ln w="12700">
+            <a:solidFill>
+              <a:srgbClr val="0369A1"/>
+            </a:solidFill>
+            <a:prstDash val="solid"/>
+          </a:ln>
+        </p:spPr>
+      </p:sp>
+      <p:sp>
+        <p:nvSpPr>
+          <p:cNvPr id="18" name="Shape 16"/>
+          <p:cNvSpPr/>
+          <p:nvPr/>
+        </p:nvSpPr>
+        <p:spPr>
+          <a:xfrm>
+            <a:off x="8287715" y="91440"/>
+            <a:ext cx="73152" cy="274320"/>
+          </a:xfrm>
+          <a:prstGeom prst="rect">
+            <a:avLst/>
+          </a:prstGeom>
+          <a:solidFill>
+            <a:srgbClr val="0369A1"/>
+          </a:solidFill>
+          <a:ln w="12700">
+            <a:solidFill>
+              <a:srgbClr val="0369A1"/>
+            </a:solidFill>
+            <a:prstDash val="solid"/>
+          </a:ln>
+        </p:spPr>
+      </p:sp>
+      <p:pic>
+        <p:nvPicPr>
+          <p:cNvPr id="19" name="Image 0" descr="preencoded.png">    </p:cNvPr>
+          <p:cNvPicPr>
+            <a:picLocks noChangeAspect="1"/>
+          </p:cNvPicPr>
+          <p:nvPr/>
+        </p:nvPicPr>
+        <p:blipFill>
+          <a:blip r:embed="rId1"/>
+          <a:stretch>
+            <a:fillRect/>
+          </a:stretch>
+        </p:blipFill>
+        <p:spPr>
+          <a:xfrm>
+            <a:off x="8415731" y="128016"/>
+            <a:ext cx="201168" cy="201168"/>
+          </a:xfrm>
+          <a:prstGeom prst="rect">
+            <a:avLst/>
+          </a:prstGeom>
+        </p:spPr>
+      </p:pic>
+      <p:sp>
+        <p:nvSpPr>
+          <p:cNvPr id="20" name="Text 17"/>
+          <p:cNvSpPr txBox="1"/>
+          <p:nvPr/>
+        </p:nvSpPr>
+        <p:spPr>
+          <a:xfrm>
+            <a:off x="8671763" y="91440"/>
+            <a:ext cx="2934716" cy="274320"/>
+          </a:xfrm>
+          <a:prstGeom prst="rect">
+            <a:avLst/>
+          </a:prstGeom>
+          <a:noFill/>
+          <a:ln/>
+        </p:spPr>
+        <p:txBody>
+          <a:bodyPr wrap="square" lIns="0" tIns="0" rIns="0" bIns="0" rtlCol="0" anchor="ctr"/>
+          <a:lstStyle/>
+          <a:p>
+            <a:pPr indent="0" marL="0">
+              <a:buNone/>
+            </a:pPr>
+            <a:r>
+              <a:rPr lang="en-US" sz="1100" b="1" dirty="0">
+                <a:solidFill>
+                  <a:srgbClr val="075985"/>
+                </a:solidFill>
+                <a:latin typeface="Calibri" pitchFamily="34" charset="0"/>
+                <a:ea typeface="Calibri" pitchFamily="34" charset="-122"/>
+                <a:cs typeface="Calibri" pitchFamily="34" charset="-120"/>
+              </a:rPr>
+              <a:t>UNDERSTAND NOW</a:t>
+            </a:r>
+            <a:pPr indent="0" marL="0">
+              <a:buNone/>
+            </a:pPr>
+            <a:r>
+              <a:rPr lang="en-US" sz="1100" dirty="0">
+                <a:solidFill>
+                  <a:srgbClr val="075985"/>
+                </a:solidFill>
+                <a:latin typeface="Calibri" pitchFamily="34" charset="0"/>
+                <a:ea typeface="Calibri" pitchFamily="34" charset="-122"/>
+                <a:cs typeface="Calibri" pitchFamily="34" charset="-120"/>
+              </a:rPr>
+              <a:t> · .text, .rodata, .data</a:t>
+            </a:r>
+            <a:endParaRPr lang="en-US" sz="1100" dirty="0"/>
+          </a:p>
+        </p:txBody>
+      </p:sp>
+      <p:sp>
+        <p:nvSpPr>
           <p:cNvPr id="25" name="Slide Number Placeholder 0"/>
           <p:cNvSpPr>
             <a:spLocks noGrp="1"/>
@@ -32191,6 +35668,133 @@
       </p:sp>
       <p:sp>
         <p:nvSpPr>
+          <p:cNvPr id="14" name="Shape 12"/>
+          <p:cNvSpPr/>
+          <p:nvPr/>
+        </p:nvSpPr>
+        <p:spPr>
+          <a:xfrm>
+            <a:off x="8287715" y="91440"/>
+            <a:ext cx="3355340" cy="274320"/>
+          </a:xfrm>
+          <a:prstGeom prst="rect">
+            <a:avLst/>
+          </a:prstGeom>
+          <a:solidFill>
+            <a:srgbClr val="E0F2FE"/>
+          </a:solidFill>
+          <a:ln w="12700">
+            <a:solidFill>
+              <a:srgbClr val="0369A1"/>
+            </a:solidFill>
+            <a:prstDash val="solid"/>
+          </a:ln>
+        </p:spPr>
+      </p:sp>
+      <p:sp>
+        <p:nvSpPr>
+          <p:cNvPr id="15" name="Shape 13"/>
+          <p:cNvSpPr/>
+          <p:nvPr/>
+        </p:nvSpPr>
+        <p:spPr>
+          <a:xfrm>
+            <a:off x="8287715" y="91440"/>
+            <a:ext cx="73152" cy="274320"/>
+          </a:xfrm>
+          <a:prstGeom prst="rect">
+            <a:avLst/>
+          </a:prstGeom>
+          <a:solidFill>
+            <a:srgbClr val="0369A1"/>
+          </a:solidFill>
+          <a:ln w="12700">
+            <a:solidFill>
+              <a:srgbClr val="0369A1"/>
+            </a:solidFill>
+            <a:prstDash val="solid"/>
+          </a:ln>
+        </p:spPr>
+      </p:sp>
+      <p:pic>
+        <p:nvPicPr>
+          <p:cNvPr id="16" name="Image 0" descr="preencoded.png">    </p:cNvPr>
+          <p:cNvPicPr>
+            <a:picLocks noChangeAspect="1"/>
+          </p:cNvPicPr>
+          <p:nvPr/>
+        </p:nvPicPr>
+        <p:blipFill>
+          <a:blip r:embed="rId1"/>
+          <a:stretch>
+            <a:fillRect/>
+          </a:stretch>
+        </p:blipFill>
+        <p:spPr>
+          <a:xfrm>
+            <a:off x="8415731" y="128016"/>
+            <a:ext cx="201168" cy="201168"/>
+          </a:xfrm>
+          <a:prstGeom prst="rect">
+            <a:avLst/>
+          </a:prstGeom>
+        </p:spPr>
+      </p:pic>
+      <p:sp>
+        <p:nvSpPr>
+          <p:cNvPr id="17" name="Text 14"/>
+          <p:cNvSpPr txBox="1"/>
+          <p:nvPr/>
+        </p:nvSpPr>
+        <p:spPr>
+          <a:xfrm>
+            <a:off x="8671763" y="91440"/>
+            <a:ext cx="2934716" cy="274320"/>
+          </a:xfrm>
+          <a:prstGeom prst="rect">
+            <a:avLst/>
+          </a:prstGeom>
+          <a:noFill/>
+          <a:ln/>
+        </p:spPr>
+        <p:txBody>
+          <a:bodyPr wrap="square" lIns="0" tIns="0" rIns="0" bIns="0" rtlCol="0" anchor="ctr"/>
+          <a:lstStyle/>
+          <a:p>
+            <a:pPr indent="0" marL="0">
+              <a:buNone/>
+            </a:pPr>
+            <a:r>
+              <a:rPr lang="en-US" sz="1100" b="1" dirty="0">
+                <a:solidFill>
+                  <a:srgbClr val="075985"/>
+                </a:solidFill>
+                <a:latin typeface="Calibri" pitchFamily="34" charset="0"/>
+                <a:ea typeface="Calibri" pitchFamily="34" charset="-122"/>
+                <a:cs typeface="Calibri" pitchFamily="34" charset="-120"/>
+              </a:rPr>
+              <a:t>UNDERSTAND NOW</a:t>
+            </a:r>
+            <a:pPr indent="0" marL="0">
+              <a:buNone/>
+            </a:pPr>
+            <a:r>
+              <a:rPr lang="en-US" sz="1100" dirty="0">
+                <a:solidFill>
+                  <a:srgbClr val="075985"/>
+                </a:solidFill>
+                <a:latin typeface="Calibri" pitchFamily="34" charset="0"/>
+                <a:ea typeface="Calibri" pitchFamily="34" charset="-122"/>
+                <a:cs typeface="Calibri" pitchFamily="34" charset="-120"/>
+              </a:rPr>
+              <a:t> · finite-state machines</a:t>
+            </a:r>
+            <a:endParaRPr lang="en-US" sz="1100" dirty="0"/>
+          </a:p>
+        </p:txBody>
+      </p:sp>
+      <p:sp>
+        <p:nvSpPr>
           <p:cNvPr id="25" name="Slide Number Placeholder 0"/>
           <p:cNvSpPr>
             <a:spLocks noGrp="1"/>
@@ -33052,6 +36656,299 @@
       </p:sp>
       <p:sp>
         <p:nvSpPr>
+          <p:cNvPr id="17" name="Shape 15"/>
+          <p:cNvSpPr/>
+          <p:nvPr/>
+        </p:nvSpPr>
+        <p:spPr>
+          <a:xfrm>
+            <a:off x="7865821" y="91440"/>
+            <a:ext cx="3777234" cy="274320"/>
+          </a:xfrm>
+          <a:prstGeom prst="rect">
+            <a:avLst/>
+          </a:prstGeom>
+          <a:solidFill>
+            <a:srgbClr val="FEF3C7"/>
+          </a:solidFill>
+          <a:ln w="12700">
+            <a:solidFill>
+              <a:srgbClr val="B45309"/>
+            </a:solidFill>
+            <a:prstDash val="solid"/>
+          </a:ln>
+        </p:spPr>
+      </p:sp>
+      <p:sp>
+        <p:nvSpPr>
+          <p:cNvPr id="18" name="Shape 16"/>
+          <p:cNvSpPr/>
+          <p:nvPr/>
+        </p:nvSpPr>
+        <p:spPr>
+          <a:xfrm>
+            <a:off x="7865821" y="91440"/>
+            <a:ext cx="27432" cy="274320"/>
+          </a:xfrm>
+          <a:prstGeom prst="rect">
+            <a:avLst/>
+          </a:prstGeom>
+          <a:solidFill>
+            <a:srgbClr val="B45309"/>
+          </a:solidFill>
+          <a:ln w="12700">
+            <a:solidFill>
+              <a:srgbClr val="B45309"/>
+            </a:solidFill>
+            <a:prstDash val="solid"/>
+          </a:ln>
+        </p:spPr>
+      </p:sp>
+      <p:sp>
+        <p:nvSpPr>
+          <p:cNvPr id="19" name="Shape 17"/>
+          <p:cNvSpPr/>
+          <p:nvPr/>
+        </p:nvSpPr>
+        <p:spPr>
+          <a:xfrm>
+            <a:off x="7920685" y="91440"/>
+            <a:ext cx="27432" cy="274320"/>
+          </a:xfrm>
+          <a:prstGeom prst="rect">
+            <a:avLst/>
+          </a:prstGeom>
+          <a:solidFill>
+            <a:srgbClr val="B45309"/>
+          </a:solidFill>
+          <a:ln w="12700">
+            <a:solidFill>
+              <a:srgbClr val="B45309"/>
+            </a:solidFill>
+            <a:prstDash val="solid"/>
+          </a:ln>
+        </p:spPr>
+      </p:sp>
+      <p:pic>
+        <p:nvPicPr>
+          <p:cNvPr id="20" name="Image 0" descr="preencoded.png">    </p:cNvPr>
+          <p:cNvPicPr>
+            <a:picLocks noChangeAspect="1"/>
+          </p:cNvPicPr>
+          <p:nvPr/>
+        </p:nvPicPr>
+        <p:blipFill>
+          <a:blip r:embed="rId1"/>
+          <a:stretch>
+            <a:fillRect/>
+          </a:stretch>
+        </p:blipFill>
+        <p:spPr>
+          <a:xfrm>
+            <a:off x="7993837" y="128016"/>
+            <a:ext cx="201168" cy="201168"/>
+          </a:xfrm>
+          <a:prstGeom prst="rect">
+            <a:avLst/>
+          </a:prstGeom>
+        </p:spPr>
+      </p:pic>
+      <p:sp>
+        <p:nvSpPr>
+          <p:cNvPr id="21" name="Text 18"/>
+          <p:cNvSpPr txBox="1"/>
+          <p:nvPr/>
+        </p:nvSpPr>
+        <p:spPr>
+          <a:xfrm>
+            <a:off x="8249869" y="91440"/>
+            <a:ext cx="3356610" cy="274320"/>
+          </a:xfrm>
+          <a:prstGeom prst="rect">
+            <a:avLst/>
+          </a:prstGeom>
+          <a:noFill/>
+          <a:ln/>
+        </p:spPr>
+        <p:txBody>
+          <a:bodyPr wrap="square" lIns="0" tIns="0" rIns="0" bIns="0" rtlCol="0" anchor="ctr"/>
+          <a:lstStyle/>
+          <a:p>
+            <a:pPr indent="0" marL="0">
+              <a:buNone/>
+            </a:pPr>
+            <a:r>
+              <a:rPr lang="en-US" sz="1100" b="1" dirty="0">
+                <a:solidFill>
+                  <a:srgbClr val="92400E"/>
+                </a:solidFill>
+                <a:latin typeface="Calibri" pitchFamily="34" charset="0"/>
+                <a:ea typeface="Calibri" pitchFamily="34" charset="-122"/>
+                <a:cs typeface="Calibri" pitchFamily="34" charset="-120"/>
+              </a:rPr>
+              <a:t>USE NOW</a:t>
+            </a:r>
+            <a:pPr indent="0" marL="0">
+              <a:buNone/>
+            </a:pPr>
+            <a:r>
+              <a:rPr lang="en-US" sz="1100" dirty="0">
+                <a:solidFill>
+                  <a:srgbClr val="92400E"/>
+                </a:solidFill>
+                <a:latin typeface="Calibri" pitchFamily="34" charset="0"/>
+                <a:ea typeface="Calibri" pitchFamily="34" charset="-122"/>
+                <a:cs typeface="Calibri" pitchFamily="34" charset="-120"/>
+              </a:rPr>
+              <a:t> · the calling convention</a:t>
+            </a:r>
+            <a:pPr indent="0" marL="0">
+              <a:buNone/>
+            </a:pPr>
+            <a:r>
+              <a:rPr lang="en-US" sz="1100" b="1" dirty="0">
+                <a:solidFill>
+                  <a:srgbClr val="92400E"/>
+                </a:solidFill>
+                <a:latin typeface="Calibri" pitchFamily="34" charset="0"/>
+                <a:ea typeface="Calibri" pitchFamily="34" charset="-122"/>
+                <a:cs typeface="Calibri" pitchFamily="34" charset="-120"/>
+              </a:rPr>
+              <a:t> → Lecture 18</a:t>
+            </a:r>
+            <a:endParaRPr lang="en-US" sz="1100" dirty="0"/>
+          </a:p>
+        </p:txBody>
+      </p:sp>
+      <p:sp>
+        <p:nvSpPr>
+          <p:cNvPr id="22" name="Shape 19"/>
+          <p:cNvSpPr/>
+          <p:nvPr/>
+        </p:nvSpPr>
+        <p:spPr>
+          <a:xfrm>
+            <a:off x="4335094" y="91440"/>
+            <a:ext cx="3420999" cy="274320"/>
+          </a:xfrm>
+          <a:prstGeom prst="rect">
+            <a:avLst/>
+          </a:prstGeom>
+          <a:solidFill>
+            <a:srgbClr val="E0F2FE"/>
+          </a:solidFill>
+          <a:ln w="12700">
+            <a:solidFill>
+              <a:srgbClr val="0369A1"/>
+            </a:solidFill>
+            <a:prstDash val="solid"/>
+          </a:ln>
+        </p:spPr>
+      </p:sp>
+      <p:sp>
+        <p:nvSpPr>
+          <p:cNvPr id="23" name="Shape 20"/>
+          <p:cNvSpPr/>
+          <p:nvPr/>
+        </p:nvSpPr>
+        <p:spPr>
+          <a:xfrm>
+            <a:off x="4335094" y="91440"/>
+            <a:ext cx="73152" cy="274320"/>
+          </a:xfrm>
+          <a:prstGeom prst="rect">
+            <a:avLst/>
+          </a:prstGeom>
+          <a:solidFill>
+            <a:srgbClr val="0369A1"/>
+          </a:solidFill>
+          <a:ln w="12700">
+            <a:solidFill>
+              <a:srgbClr val="0369A1"/>
+            </a:solidFill>
+            <a:prstDash val="solid"/>
+          </a:ln>
+        </p:spPr>
+      </p:sp>
+      <p:pic>
+        <p:nvPicPr>
+          <p:cNvPr id="24" name="Image 1" descr="preencoded.png">    </p:cNvPr>
+          <p:cNvPicPr>
+            <a:picLocks noChangeAspect="1"/>
+          </p:cNvPicPr>
+          <p:nvPr/>
+        </p:nvPicPr>
+        <p:blipFill>
+          <a:blip r:embed="rId2"/>
+          <a:stretch>
+            <a:fillRect/>
+          </a:stretch>
+        </p:blipFill>
+        <p:spPr>
+          <a:xfrm>
+            <a:off x="4463110" y="128016"/>
+            <a:ext cx="201168" cy="201168"/>
+          </a:xfrm>
+          <a:prstGeom prst="rect">
+            <a:avLst/>
+          </a:prstGeom>
+        </p:spPr>
+      </p:pic>
+      <p:sp>
+        <p:nvSpPr>
+          <p:cNvPr id="25" name="Text 21"/>
+          <p:cNvSpPr txBox="1"/>
+          <p:nvPr/>
+        </p:nvSpPr>
+        <p:spPr>
+          <a:xfrm>
+            <a:off x="4719142" y="91440"/>
+            <a:ext cx="3000375" cy="274320"/>
+          </a:xfrm>
+          <a:prstGeom prst="rect">
+            <a:avLst/>
+          </a:prstGeom>
+          <a:noFill/>
+          <a:ln/>
+        </p:spPr>
+        <p:txBody>
+          <a:bodyPr wrap="square" lIns="0" tIns="0" rIns="0" bIns="0" rtlCol="0" anchor="ctr"/>
+          <a:lstStyle/>
+          <a:p>
+            <a:pPr indent="0" marL="0">
+              <a:buNone/>
+            </a:pPr>
+            <a:r>
+              <a:rPr lang="en-US" sz="1100" b="1" dirty="0">
+                <a:solidFill>
+                  <a:srgbClr val="075985"/>
+                </a:solidFill>
+                <a:latin typeface="Calibri" pitchFamily="34" charset="0"/>
+                <a:ea typeface="Calibri" pitchFamily="34" charset="-122"/>
+                <a:cs typeface="Calibri" pitchFamily="34" charset="-120"/>
+              </a:rPr>
+              <a:t>UNDERSTAND NOW</a:t>
+            </a:r>
+            <a:pPr indent="0" marL="0">
+              <a:buNone/>
+            </a:pPr>
+            <a:r>
+              <a:rPr lang="en-US" sz="1100" dirty="0">
+                <a:solidFill>
+                  <a:srgbClr val="075985"/>
+                </a:solidFill>
+                <a:latin typeface="Calibri" pitchFamily="34" charset="0"/>
+                <a:ea typeface="Calibri" pitchFamily="34" charset="-122"/>
+                <a:cs typeface="Calibri" pitchFamily="34" charset="-120"/>
+              </a:rPr>
+              <a:t> · latches and flip-flops</a:t>
+            </a:r>
+            <a:endParaRPr lang="en-US" sz="1100" dirty="0"/>
+          </a:p>
+        </p:txBody>
+      </p:sp>
+      <p:sp>
+        <p:nvSpPr>
           <p:cNvPr id="25" name="Slide Number Placeholder 0"/>
           <p:cNvSpPr>
             <a:spLocks noGrp="1"/>
@@ -34092,6 +37989,133 @@
               <a:t>Named labels: u_play, u_start, u_done</a:t>
             </a:r>
             <a:endParaRPr lang="en-US" sz="1300" dirty="0"/>
+          </a:p>
+        </p:txBody>
+      </p:sp>
+      <p:sp>
+        <p:nvSpPr>
+          <p:cNvPr id="17" name="Shape 15"/>
+          <p:cNvSpPr/>
+          <p:nvPr/>
+        </p:nvSpPr>
+        <p:spPr>
+          <a:xfrm>
+            <a:off x="8287715" y="91440"/>
+            <a:ext cx="3355340" cy="274320"/>
+          </a:xfrm>
+          <a:prstGeom prst="rect">
+            <a:avLst/>
+          </a:prstGeom>
+          <a:solidFill>
+            <a:srgbClr val="E0F2FE"/>
+          </a:solidFill>
+          <a:ln w="12700">
+            <a:solidFill>
+              <a:srgbClr val="0369A1"/>
+            </a:solidFill>
+            <a:prstDash val="solid"/>
+          </a:ln>
+        </p:spPr>
+      </p:sp>
+      <p:sp>
+        <p:nvSpPr>
+          <p:cNvPr id="18" name="Shape 16"/>
+          <p:cNvSpPr/>
+          <p:nvPr/>
+        </p:nvSpPr>
+        <p:spPr>
+          <a:xfrm>
+            <a:off x="8287715" y="91440"/>
+            <a:ext cx="73152" cy="274320"/>
+          </a:xfrm>
+          <a:prstGeom prst="rect">
+            <a:avLst/>
+          </a:prstGeom>
+          <a:solidFill>
+            <a:srgbClr val="0369A1"/>
+          </a:solidFill>
+          <a:ln w="12700">
+            <a:solidFill>
+              <a:srgbClr val="0369A1"/>
+            </a:solidFill>
+            <a:prstDash val="solid"/>
+          </a:ln>
+        </p:spPr>
+      </p:sp>
+      <p:pic>
+        <p:nvPicPr>
+          <p:cNvPr id="19" name="Image 0" descr="preencoded.png">    </p:cNvPr>
+          <p:cNvPicPr>
+            <a:picLocks noChangeAspect="1"/>
+          </p:cNvPicPr>
+          <p:nvPr/>
+        </p:nvPicPr>
+        <p:blipFill>
+          <a:blip r:embed="rId1"/>
+          <a:stretch>
+            <a:fillRect/>
+          </a:stretch>
+        </p:blipFill>
+        <p:spPr>
+          <a:xfrm>
+            <a:off x="8415731" y="128016"/>
+            <a:ext cx="201168" cy="201168"/>
+          </a:xfrm>
+          <a:prstGeom prst="rect">
+            <a:avLst/>
+          </a:prstGeom>
+        </p:spPr>
+      </p:pic>
+      <p:sp>
+        <p:nvSpPr>
+          <p:cNvPr id="20" name="Text 17"/>
+          <p:cNvSpPr txBox="1"/>
+          <p:nvPr/>
+        </p:nvSpPr>
+        <p:spPr>
+          <a:xfrm>
+            <a:off x="8671763" y="91440"/>
+            <a:ext cx="2934716" cy="274320"/>
+          </a:xfrm>
+          <a:prstGeom prst="rect">
+            <a:avLst/>
+          </a:prstGeom>
+          <a:noFill/>
+          <a:ln/>
+        </p:spPr>
+        <p:txBody>
+          <a:bodyPr wrap="square" lIns="0" tIns="0" rIns="0" bIns="0" rtlCol="0" anchor="ctr"/>
+          <a:lstStyle/>
+          <a:p>
+            <a:pPr indent="0" marL="0">
+              <a:buNone/>
+            </a:pPr>
+            <a:r>
+              <a:rPr lang="en-US" sz="1100" b="1" dirty="0">
+                <a:solidFill>
+                  <a:srgbClr val="075985"/>
+                </a:solidFill>
+                <a:latin typeface="Calibri" pitchFamily="34" charset="0"/>
+                <a:ea typeface="Calibri" pitchFamily="34" charset="-122"/>
+                <a:cs typeface="Calibri" pitchFamily="34" charset="-120"/>
+              </a:rPr>
+              <a:t>UNDERSTAND NOW</a:t>
+            </a:r>
+            <a:pPr indent="0" marL="0">
+              <a:buNone/>
+            </a:pPr>
+            <a:r>
+              <a:rPr lang="en-US" sz="1100" dirty="0">
+                <a:solidFill>
+                  <a:srgbClr val="075985"/>
+                </a:solidFill>
+                <a:latin typeface="Calibri" pitchFamily="34" charset="0"/>
+                <a:ea typeface="Calibri" pitchFamily="34" charset="-122"/>
+                <a:cs typeface="Calibri" pitchFamily="34" charset="-120"/>
+              </a:rPr>
+              <a:t> · finite-state machines</a:t>
+            </a:r>
+            <a:endParaRPr lang="en-US" sz="1100" dirty="0"/>
           </a:p>
         </p:txBody>
       </p:sp>

--- a/en/slides/17-Computer_Architecture-Verm1_Part_3-Code.pptx
+++ b/en/slides/17-Computer_Architecture-Verm1_Part_3-Code.pptx
@@ -143,25 +143,25 @@
   <p:extLst>
     <p:ext uri="{521415D9-36F7-43E2-AB2F-B90AF26B5E84}">
       <p14:sectionLst xmlns:p14="http://schemas.microsoft.com/office/powerpoint/2010/main">
-        <p14:section name="Opening" id="{0cdc2486-9042-7b9a-fe47-d46754333ed5}">
+        <p14:section name="Opening" id="{3b1003d5-5506-68f0-2e84-88022165e8ea}">
           <p14:sldIdLst>
             <p14:sldId id="256"/>
             <p14:sldId id="257"/>
           </p14:sldIdLst>
         </p14:section>
-        <p14:section name="The listings" id="{7002814b-2c3d-dafb-ad90-66477ad367a5}">
+        <p14:section name="The listings" id="{87fa948b-44ee-37fa-1bae-d97b9a51026d}">
           <p14:sldIdLst>
             <p14:sldId id="258"/>
           </p14:sldIdLst>
         </p14:section>
-        <p14:section name="Step 1: the memory of the game" id="{2c571566-ed84-b73c-53c1-08e807e0eddd}">
+        <p14:section name="Step 1: the memory of the game" id="{49d324b8-47b9-d911-eeda-ca4e9e960a7c}">
           <p14:sldIdLst>
             <p14:sldId id="259"/>
             <p14:sldId id="260"/>
             <p14:sldId id="261"/>
           </p14:sldIdLst>
         </p14:section>
-        <p14:section name="Step 2: three states" id="{ce257280-36d2-479f-671f-3815c144c4aa}">
+        <p14:section name="Step 2: three states" id="{4207c2f2-c896-bed7-7ed1-0dc77d3c3748}">
           <p14:sldIdLst>
             <p14:sldId id="262"/>
             <p14:sldId id="263"/>
@@ -172,7 +172,7 @@
             <p14:sldId id="268"/>
           </p14:sldIdLst>
         </p14:section>
-        <p14:section name="Step 3: a worm in memory" id="{74eeb315-447c-b6b6-270b-96466c7da374}">
+        <p14:section name="Step 3: a worm in memory" id="{40662b43-e96e-c345-f88f-63dfdd79385b}">
           <p14:sldIdLst>
             <p14:sldId id="269"/>
             <p14:sldId id="270"/>
@@ -182,7 +182,7 @@
             <p14:sldId id="274"/>
           </p14:sldIdLst>
         </p14:section>
-        <p14:section name="Step 4: rules" id="{f900dbac-55b4-7243-331f-85926c77eceb}">
+        <p14:section name="Step 4: rules" id="{dc90dc86-0569-622d-d7c9-67860faaeb88}">
           <p14:sldIdLst>
             <p14:sldId id="275"/>
             <p14:sldId id="276"/>
@@ -195,14 +195,14 @@
             <p14:sldId id="283"/>
           </p14:sldIdLst>
         </p14:section>
-        <p14:section name="Step 5: look at memory move" id="{07607f92-4ba0-dab9-b522-f0f2ac55826f}">
+        <p14:section name="Step 5: look at memory move" id="{5a41be1d-e848-2b2d-622d-c037f999397b}">
           <p14:sldIdLst>
             <p14:sldId id="284"/>
             <p14:sldId id="285"/>
             <p14:sldId id="286"/>
           </p14:sldIdLst>
         </p14:section>
-        <p14:section name="Run it and test it" id="{5e98c29e-0f47-5a3a-772f-a7738a2402ac}">
+        <p14:section name="Run it and test it" id="{79ecc2f9-d7fa-0b36-73a9-b4b8a036de10}">
           <p14:sldIdLst>
             <p14:sldId id="287"/>
             <p14:sldId id="288"/>
@@ -211,7 +211,7 @@
             <p14:sldId id="291"/>
           </p14:sldIdLst>
         </p14:section>
-        <p14:section name="Exercises" id="{809db2a7-1d89-e2ca-0ab6-bd364af84619}">
+        <p14:section name="Exercises" id="{0bb61495-262e-e1c7-01da-57e44e75913c}">
           <p14:sldIdLst>
             <p14:sldId id="292"/>
           </p14:sldIdLst>
